--- a/examples/dogfood/output/deck.pptx
+++ b/examples/dogfood/output/deck.pptx
@@ -6168,7 +6168,7 @@
                 </a:solidFill>
                 <a:latin typeface="IBM Plex Sans"/>
               </a:rPr>
-              <a:t>Data Flow: From Raw Sources to Rendered Output</a:t>
+              <a:t>docloom architecture, end to end</a:t>
             </a:r>
           </a:p>
         </p:txBody>
@@ -6219,7 +6219,7 @@
       </p:sp>
       <p:pic>
         <p:nvPicPr>
-          <p:cNvPr id="4" name="docloom:diagram:anon:2525cff29983" descr="docloom architecture: sources to finished documents"/>
+          <p:cNvPr id="4" name="docloom:diagram:anon:9bd9a0f4086a" descr="docloom architecture (full)"/>
           <p:cNvPicPr>
             <a:picLocks noChangeAspect="1"/>
           </p:cNvPicPr>
@@ -6233,8 +6233,8 @@
         </p:blipFill>
         <p:spPr>
           <a:xfrm>
-            <a:off x="548640" y="2190754"/>
-            <a:ext cx="11094415" cy="1088639"/>
+            <a:off x="548640" y="1298448"/>
+            <a:ext cx="11094415" cy="3536344"/>
           </a:xfrm>
           <a:prstGeom prst="rect">
             <a:avLst/>
@@ -6249,7 +6249,7 @@
         </p:nvSpPr>
         <p:spPr>
           <a:xfrm>
-            <a:off x="548640" y="3315969"/>
+            <a:off x="548640" y="4871368"/>
             <a:ext cx="11094415" cy="201168"/>
           </a:xfrm>
           <a:prstGeom prst="rect">
@@ -6271,7 +6271,7 @@
                 </a:solidFill>
                 <a:latin typeface="IBM Plex Sans"/>
               </a:rPr>
-              <a:t>The model emits validated structure; deterministic renderers produce every format.</a:t>
+              <a:t>The full studio + engine architecture: auth, retrieval, jobs, generation, versioned artifacts, and deterministic rendering.</a:t>
             </a:r>
           </a:p>
         </p:txBody>
@@ -6284,7 +6284,7 @@
         </p:nvSpPr>
         <p:spPr>
           <a:xfrm>
-            <a:off x="548640" y="4120641"/>
+            <a:off x="548640" y="5218840"/>
             <a:ext cx="11094415" cy="922020"/>
           </a:xfrm>
           <a:prstGeom prst="rect">

--- a/examples/dogfood/output/deck.pptx
+++ b/examples/dogfood/output/deck.pptx
@@ -18,6 +18,9 @@
     <p:sldId id="266" r:id="rId18"/>
     <p:sldId id="267" r:id="rId19"/>
     <p:sldId id="268" r:id="rId20"/>
+    <p:sldId id="269" r:id="rId21"/>
+    <p:sldId id="270" r:id="rId22"/>
+    <p:sldId id="271" r:id="rId23"/>
   </p:sldIdLst>
   <p:sldSz cx="12191695" cy="6858000" type="screen4x3"/>
   <p:notesSz cx="6858000" cy="9144000"/>
@@ -514,7 +517,7 @@
           <a:lstStyle/>
           <a:p>
             <a:r>
-              <a:t>Welcome to docloom. This deck is authored using docloom itselfâ€”a dogfood test. We're going to walk through the problem we solve, the architecture, and how you can use it today.</a:t>
+              <a:t>Welcome to docloom. This deck is authored using docloom itself—a dogfood test. We're going to walk through the problem we solve, the architecture, and how you can use it today.</a:t>
             </a:r>
           </a:p>
         </p:txBody>
@@ -584,7 +587,7 @@
           <a:lstStyle/>
           <a:p>
             <a:r>
-              <a:t>Getting started is simple. One launcher script handles everything. The first visit registers a local account; everything stays in your data directory.</a:t>
+              <a:t>The studio brings it all together: import sources, chat with them, generate artifacts. Everything works offline with a local model.</a:t>
             </a:r>
           </a:p>
         </p:txBody>
@@ -654,7 +657,7 @@
           <a:lstStyle/>
           <a:p>
             <a:r>
-              <a:t>Fully configurable. Switch providers in the UI without restarting. Add Postgres for multi-node deployments. All secrets are encrypted at rest.</a:t>
+              <a:t>Quality is not an afterthought. Every diagram label is tested for legibility. PPTX text is actually measured, not guessed.</a:t>
             </a:r>
           </a:p>
         </p:txBody>
@@ -724,6 +727,216 @@
           <a:lstStyle/>
           <a:p>
             <a:r>
+              <a:t>The studio is designed for privacy and safety. You own your data. There's no third-party account required, no API keys sent to the cloud unless you choose.</a:t>
+            </a:r>
+          </a:p>
+        </p:txBody>
+      </p:sp>
+      <p:sp>
+        <p:nvSpPr>
+          <p:cNvPr id="4" name="Slide Number Placeholder 3"/>
+          <p:cNvSpPr>
+            <a:spLocks noGrp="1"/>
+          </p:cNvSpPr>
+          <p:nvPr>
+            <p:ph type="sldNum" idx="5" sz="quarter"/>
+          </p:nvPr>
+        </p:nvSpPr>
+        <p:spPr/>
+      </p:sp>
+    </p:spTree>
+  </p:cSld>
+  <p:clrMapOvr>
+    <a:masterClrMapping/>
+  </p:clrMapOvr>
+</p:notes>
+</file>
+
+<file path=ppt/notesSlides/notesSlide13.xml><?xml version="1.0" encoding="utf-8"?>
+<p:notes xmlns:a="http://schemas.openxmlformats.org/drawingml/2006/main" xmlns:p="http://schemas.openxmlformats.org/presentationml/2006/main" xmlns:r="http://schemas.openxmlformats.org/officeDocument/2006/relationships">
+  <p:cSld>
+    <p:spTree>
+      <p:nvGrpSpPr>
+        <p:cNvPr id="1" name=""/>
+        <p:cNvGrpSpPr/>
+        <p:nvPr/>
+      </p:nvGrpSpPr>
+      <p:grpSpPr>
+        <a:xfrm>
+          <a:off x="0" y="0"/>
+          <a:ext cx="0" cy="0"/>
+          <a:chOff x="0" y="0"/>
+          <a:chExt cx="0" cy="0"/>
+        </a:xfrm>
+      </p:grpSpPr>
+      <p:sp>
+        <p:nvSpPr>
+          <p:cNvPr id="2" name="Slide Image Placeholder 1"/>
+          <p:cNvSpPr>
+            <a:spLocks noGrp="1"/>
+          </p:cNvSpPr>
+          <p:nvPr>
+            <p:ph type="sldImg" idx="2"/>
+          </p:nvPr>
+        </p:nvSpPr>
+        <p:spPr/>
+      </p:sp>
+      <p:sp>
+        <p:nvSpPr>
+          <p:cNvPr id="3" name="Notes Placeholder 2"/>
+          <p:cNvSpPr>
+            <a:spLocks noGrp="1"/>
+          </p:cNvSpPr>
+          <p:nvPr>
+            <p:ph type="body" idx="3" sz="quarter"/>
+          </p:nvPr>
+        </p:nvSpPr>
+        <p:spPr/>
+        <p:txBody>
+          <a:bodyPr/>
+          <a:lstStyle/>
+          <a:p>
+            <a:r>
+              <a:t>Getting started is simple. One launcher script handles everything. The first visit registers a local account; everything stays in your data directory.</a:t>
+            </a:r>
+          </a:p>
+        </p:txBody>
+      </p:sp>
+      <p:sp>
+        <p:nvSpPr>
+          <p:cNvPr id="4" name="Slide Number Placeholder 3"/>
+          <p:cNvSpPr>
+            <a:spLocks noGrp="1"/>
+          </p:cNvSpPr>
+          <p:nvPr>
+            <p:ph type="sldNum" idx="5" sz="quarter"/>
+          </p:nvPr>
+        </p:nvSpPr>
+        <p:spPr/>
+      </p:sp>
+    </p:spTree>
+  </p:cSld>
+  <p:clrMapOvr>
+    <a:masterClrMapping/>
+  </p:clrMapOvr>
+</p:notes>
+</file>
+
+<file path=ppt/notesSlides/notesSlide14.xml><?xml version="1.0" encoding="utf-8"?>
+<p:notes xmlns:a="http://schemas.openxmlformats.org/drawingml/2006/main" xmlns:p="http://schemas.openxmlformats.org/presentationml/2006/main" xmlns:r="http://schemas.openxmlformats.org/officeDocument/2006/relationships">
+  <p:cSld>
+    <p:spTree>
+      <p:nvGrpSpPr>
+        <p:cNvPr id="1" name=""/>
+        <p:cNvGrpSpPr/>
+        <p:nvPr/>
+      </p:nvGrpSpPr>
+      <p:grpSpPr>
+        <a:xfrm>
+          <a:off x="0" y="0"/>
+          <a:ext cx="0" cy="0"/>
+          <a:chOff x="0" y="0"/>
+          <a:chExt cx="0" cy="0"/>
+        </a:xfrm>
+      </p:grpSpPr>
+      <p:sp>
+        <p:nvSpPr>
+          <p:cNvPr id="2" name="Slide Image Placeholder 1"/>
+          <p:cNvSpPr>
+            <a:spLocks noGrp="1"/>
+          </p:cNvSpPr>
+          <p:nvPr>
+            <p:ph type="sldImg" idx="2"/>
+          </p:nvPr>
+        </p:nvSpPr>
+        <p:spPr/>
+      </p:sp>
+      <p:sp>
+        <p:nvSpPr>
+          <p:cNvPr id="3" name="Notes Placeholder 2"/>
+          <p:cNvSpPr>
+            <a:spLocks noGrp="1"/>
+          </p:cNvSpPr>
+          <p:nvPr>
+            <p:ph type="body" idx="3" sz="quarter"/>
+          </p:nvPr>
+        </p:nvSpPr>
+        <p:spPr/>
+        <p:txBody>
+          <a:bodyPr/>
+          <a:lstStyle/>
+          <a:p>
+            <a:r>
+              <a:t>Fully configurable. Switch providers in the UI without restarting. Add Postgres for multi-node deployments. All secrets are encrypted at rest.</a:t>
+            </a:r>
+          </a:p>
+        </p:txBody>
+      </p:sp>
+      <p:sp>
+        <p:nvSpPr>
+          <p:cNvPr id="4" name="Slide Number Placeholder 3"/>
+          <p:cNvSpPr>
+            <a:spLocks noGrp="1"/>
+          </p:cNvSpPr>
+          <p:nvPr>
+            <p:ph type="sldNum" idx="5" sz="quarter"/>
+          </p:nvPr>
+        </p:nvSpPr>
+        <p:spPr/>
+      </p:sp>
+    </p:spTree>
+  </p:cSld>
+  <p:clrMapOvr>
+    <a:masterClrMapping/>
+  </p:clrMapOvr>
+</p:notes>
+</file>
+
+<file path=ppt/notesSlides/notesSlide15.xml><?xml version="1.0" encoding="utf-8"?>
+<p:notes xmlns:a="http://schemas.openxmlformats.org/drawingml/2006/main" xmlns:p="http://schemas.openxmlformats.org/presentationml/2006/main" xmlns:r="http://schemas.openxmlformats.org/officeDocument/2006/relationships">
+  <p:cSld>
+    <p:spTree>
+      <p:nvGrpSpPr>
+        <p:cNvPr id="1" name=""/>
+        <p:cNvGrpSpPr/>
+        <p:nvPr/>
+      </p:nvGrpSpPr>
+      <p:grpSpPr>
+        <a:xfrm>
+          <a:off x="0" y="0"/>
+          <a:ext cx="0" cy="0"/>
+          <a:chOff x="0" y="0"/>
+          <a:chExt cx="0" cy="0"/>
+        </a:xfrm>
+      </p:grpSpPr>
+      <p:sp>
+        <p:nvSpPr>
+          <p:cNvPr id="2" name="Slide Image Placeholder 1"/>
+          <p:cNvSpPr>
+            <a:spLocks noGrp="1"/>
+          </p:cNvSpPr>
+          <p:nvPr>
+            <p:ph type="sldImg" idx="2"/>
+          </p:nvPr>
+        </p:nvSpPr>
+        <p:spPr/>
+      </p:sp>
+      <p:sp>
+        <p:nvSpPr>
+          <p:cNvPr id="3" name="Notes Placeholder 2"/>
+          <p:cNvSpPr>
+            <a:spLocks noGrp="1"/>
+          </p:cNvSpPr>
+          <p:nvPr>
+            <p:ph type="body" idx="3" sz="quarter"/>
+          </p:nvPr>
+        </p:nvSpPr>
+        <p:spPr/>
+        <p:txBody>
+          <a:bodyPr/>
+          <a:lstStyle/>
+          <a:p>
+            <a:r>
               <a:t>These principles drive every architectural decision. Schema validation prevents entire classes of bugs. Determinism means you can regenerate anytime and get the same file.</a:t>
             </a:r>
           </a:p>
@@ -934,7 +1147,7 @@
           <a:lstStyle/>
           <a:p>
             <a:r>
-              <a:t>The data flow: sources come in, get ingested and embedded, retrieval feeds grounded generation, the IR is validated, linted, and rendered. No hand-placed coordinatesâ€”the renderer owns the layout.</a:t>
+              <a:t>Determinism as a headline: the same IR plus the same theme always produces the same file, byte for byte, so you can regenerate anytime with confidence.</a:t>
             </a:r>
           </a:p>
         </p:txBody>
@@ -1004,7 +1217,7 @@
           <a:lstStyle/>
           <a:p>
             <a:r>
-              <a:t>Scale and scope: 14 block types cover everything from paragraphs to native charts to coordinate-free diagrams. 658 passing tests keep it all working.</a:t>
+              <a:t>The data flow: sources come in, get ingested and embedded, retrieval feeds grounded generation, the IR is validated, linted, and rendered. No hand-placed coordinates—the renderer owns the layout.</a:t>
             </a:r>
           </a:p>
         </p:txBody>
@@ -1074,7 +1287,7 @@
           <a:lstStyle/>
           <a:p>
             <a:r>
-              <a:t>Same IR, six completely different renderers. Each owns its own coordinates and styling. Charts in PPTX are native editable objects, not rasterized images.</a:t>
+              <a:t>The pipeline as a horizontal step band: ingest, retrieve, generate, lint, render. Each stage hands validated data to the next, with no manual formatting in between.</a:t>
             </a:r>
           </a:p>
         </p:txBody>
@@ -1144,7 +1357,7 @@
           <a:lstStyle/>
           <a:p>
             <a:r>
-              <a:t>The studio brings it all together: import sources, chat with them, generate artifacts. Everything works offline with a local model.</a:t>
+              <a:t>Scale and scope: 14 block types cover everything from paragraphs to native charts to coordinate-free diagrams. 658 passing tests keep it all working.</a:t>
             </a:r>
           </a:p>
         </p:txBody>
@@ -1214,7 +1427,7 @@
           <a:lstStyle/>
           <a:p>
             <a:r>
-              <a:t>Quality is not an afterthought. Every diagram label is tested for legibility. PPTX text is actually measured, not guessed.</a:t>
+              <a:t>Same IR, six completely different renderers. Each owns its own coordinates and styling. Charts in PPTX are native editable objects, not rasterized images.</a:t>
             </a:r>
           </a:p>
         </p:txBody>
@@ -1284,7 +1497,7 @@
           <a:lstStyle/>
           <a:p>
             <a:r>
-              <a:t>The studio is designed for privacy and safety. You own your data. There's no third-party account required, no API keys sent to the cloud unless you choose.</a:t>
+              <a:t>Every block type is a typed, validated node. Grouped into families here as mini-cards: text, tables, stats, diagrams, and code all share the same IR contract.</a:t>
             </a:r>
           </a:p>
         </p:txBody>
@@ -4306,8 +4519,8 @@
         </p:nvSpPr>
         <p:spPr>
           <a:xfrm>
-            <a:off x="0" y="0"/>
-            <a:ext cx="274320" cy="6858000"/>
+            <a:off x="0" y="1004823"/>
+            <a:ext cx="128016" cy="3840480"/>
           </a:xfrm>
           <a:prstGeom prst="rect">
             <a:avLst/>
@@ -4350,8 +4563,8 @@
         </p:nvSpPr>
         <p:spPr>
           <a:xfrm>
-            <a:off x="1005840" y="2286000"/>
-            <a:ext cx="10637215" cy="1280160"/>
+            <a:off x="1005840" y="1462024"/>
+            <a:ext cx="10637215" cy="2113280"/>
           </a:xfrm>
           <a:prstGeom prst="rect">
             <a:avLst/>
@@ -4365,7 +4578,7 @@
           <a:lstStyle/>
           <a:p>
             <a:r>
-              <a:rPr sz="4000" b="1" i="0">
+              <a:rPr sz="6400" b="1" i="0">
                 <a:solidFill>
                   <a:srgbClr val="14161A"/>
                 </a:solidFill>
@@ -4384,8 +4597,8 @@
         </p:nvSpPr>
         <p:spPr>
           <a:xfrm>
-            <a:off x="1005840" y="3657600"/>
-            <a:ext cx="10637215" cy="548640"/>
+            <a:off x="1005840" y="3575304"/>
+            <a:ext cx="10637215" cy="494792"/>
           </a:xfrm>
           <a:prstGeom prst="rect">
             <a:avLst/>
@@ -4418,7 +4631,7 @@
         </p:nvSpPr>
         <p:spPr>
           <a:xfrm>
-            <a:off x="1005840" y="5760720"/>
+            <a:off x="1005840" y="4527296"/>
             <a:ext cx="10637215" cy="320040"/>
           </a:xfrm>
           <a:prstGeom prst="rect">
@@ -4493,13 +4706,13 @@
           <a:lstStyle/>
           <a:p>
             <a:r>
-              <a:rPr sz="2600" b="1" i="0">
+              <a:rPr sz="3000" b="1" i="0">
                 <a:solidFill>
                   <a:srgbClr val="14161A"/>
                 </a:solidFill>
                 <a:latin typeface="IBM Plex Sans"/>
               </a:rPr>
-              <a:t>One Command to Launch</a:t>
+              <a:t>Turn Source Data into Grounded Artifacts</a:t>
             </a:r>
           </a:p>
         </p:txBody>
@@ -4513,7 +4726,7 @@
         <p:spPr>
           <a:xfrm>
             <a:off x="548640" y="1042416"/>
-            <a:ext cx="11094415" cy="25603"/>
+            <a:ext cx="1097280" cy="25603"/>
           </a:xfrm>
           <a:prstGeom prst="rect">
             <a:avLst/>
@@ -4556,8 +4769,8 @@
         </p:nvSpPr>
         <p:spPr>
           <a:xfrm>
-            <a:off x="548640" y="1860864"/>
-            <a:ext cx="11094415" cy="280670"/>
+            <a:off x="548640" y="2586831"/>
+            <a:ext cx="5318607" cy="350837"/>
           </a:xfrm>
           <a:prstGeom prst="rect">
             <a:avLst/>
@@ -4571,217 +4784,27 @@
           <a:lstStyle/>
           <a:p>
             <a:r>
-              <a:rPr sz="1700" b="1" i="0">
+              <a:rPr sz="2125" b="1" i="0">
                 <a:solidFill>
                   <a:srgbClr val="14161A"/>
                 </a:solidFill>
                 <a:latin typeface="IBM Plex Sans"/>
               </a:rPr>
-              <a:t>Windows (PowerShell)</a:t>
-            </a:r>
-          </a:p>
-        </p:txBody>
-      </p:sp>
-      <p:sp>
-        <p:nvSpPr>
-          <p:cNvPr id="5" name="Rectangle 4"/>
-          <p:cNvSpPr/>
-          <p:nvPr/>
-        </p:nvSpPr>
-        <p:spPr>
-          <a:xfrm>
-            <a:off x="548640" y="2214686"/>
-            <a:ext cx="11094415" cy="417576"/>
-          </a:xfrm>
-          <a:prstGeom prst="rect">
-            <a:avLst/>
-          </a:prstGeom>
-          <a:solidFill>
-            <a:srgbClr val="EBEEF3"/>
-          </a:solidFill>
-          <a:ln>
-            <a:noFill/>
-          </a:ln>
-          <a:effectLst/>
-        </p:spPr>
-        <p:style>
-          <a:lnRef idx="1">
-            <a:schemeClr val="accent1"/>
-          </a:lnRef>
-          <a:fillRef idx="3">
-            <a:schemeClr val="accent1"/>
-          </a:fillRef>
-          <a:effectRef idx="2">
-            <a:schemeClr val="accent1"/>
-          </a:effectRef>
-          <a:fontRef idx="minor">
-            <a:schemeClr val="lt1"/>
-          </a:fontRef>
-        </p:style>
-        <p:txBody>
-          <a:bodyPr rtlCol="0" anchor="ctr"/>
-          <a:lstStyle/>
-          <a:p>
-            <a:pPr algn="ctr"/>
-          </a:p>
-        </p:txBody>
-      </p:sp>
-      <p:sp>
-        <p:nvSpPr>
-          <p:cNvPr id="6" name="TextBox 5"/>
+              <a:t>Add Sources</a:t>
+            </a:r>
+          </a:p>
+        </p:txBody>
+      </p:sp>
+      <p:sp>
+        <p:nvSpPr>
+          <p:cNvPr id="5" name="TextBox 4"/>
           <p:cNvSpPr txBox="1"/>
           <p:nvPr/>
         </p:nvSpPr>
         <p:spPr>
           <a:xfrm>
-            <a:off x="658368" y="2324414"/>
-            <a:ext cx="10874959" cy="198120"/>
-          </a:xfrm>
-          <a:prstGeom prst="rect">
-            <a:avLst/>
-          </a:prstGeom>
-          <a:noFill/>
-        </p:spPr>
-        <p:txBody>
-          <a:bodyPr wrap="square" lIns="0" rIns="0" tIns="0" bIns="0">
-            <a:normAutofit/>
-          </a:bodyPr>
-          <a:lstStyle/>
-          <a:p>
-            <a:r>
-              <a:rPr sz="1200">
-                <a:solidFill>
-                  <a:srgbClr val="14161A"/>
-                </a:solidFill>
-                <a:latin typeface="Consolas"/>
-              </a:rPr>
-              <a:t>studio.ps1</a:t>
-            </a:r>
-          </a:p>
-        </p:txBody>
-      </p:sp>
-      <p:sp>
-        <p:nvSpPr>
-          <p:cNvPr id="7" name="TextBox 6"/>
-          <p:cNvSpPr txBox="1"/>
-          <p:nvPr/>
-        </p:nvSpPr>
-        <p:spPr>
-          <a:xfrm>
-            <a:off x="548640" y="3235766"/>
-            <a:ext cx="11094415" cy="280670"/>
-          </a:xfrm>
-          <a:prstGeom prst="rect">
-            <a:avLst/>
-          </a:prstGeom>
-          <a:noFill/>
-        </p:spPr>
-        <p:txBody>
-          <a:bodyPr wrap="square" lIns="0" rIns="0" tIns="0" bIns="0">
-            <a:normAutofit/>
-          </a:bodyPr>
-          <a:lstStyle/>
-          <a:p>
-            <a:r>
-              <a:rPr sz="1700" b="1" i="0">
-                <a:solidFill>
-                  <a:srgbClr val="14161A"/>
-                </a:solidFill>
-                <a:latin typeface="IBM Plex Sans"/>
-              </a:rPr>
-              <a:t>macOS / Linux / Git Bash</a:t>
-            </a:r>
-          </a:p>
-        </p:txBody>
-      </p:sp>
-      <p:sp>
-        <p:nvSpPr>
-          <p:cNvPr id="8" name="Rectangle 7"/>
-          <p:cNvSpPr/>
-          <p:nvPr/>
-        </p:nvSpPr>
-        <p:spPr>
-          <a:xfrm>
-            <a:off x="548640" y="3589588"/>
-            <a:ext cx="11094415" cy="417576"/>
-          </a:xfrm>
-          <a:prstGeom prst="rect">
-            <a:avLst/>
-          </a:prstGeom>
-          <a:solidFill>
-            <a:srgbClr val="EBEEF3"/>
-          </a:solidFill>
-          <a:ln>
-            <a:noFill/>
-          </a:ln>
-          <a:effectLst/>
-        </p:spPr>
-        <p:style>
-          <a:lnRef idx="1">
-            <a:schemeClr val="accent1"/>
-          </a:lnRef>
-          <a:fillRef idx="3">
-            <a:schemeClr val="accent1"/>
-          </a:fillRef>
-          <a:effectRef idx="2">
-            <a:schemeClr val="accent1"/>
-          </a:effectRef>
-          <a:fontRef idx="minor">
-            <a:schemeClr val="lt1"/>
-          </a:fontRef>
-        </p:style>
-        <p:txBody>
-          <a:bodyPr rtlCol="0" anchor="ctr"/>
-          <a:lstStyle/>
-          <a:p>
-            <a:pPr algn="ctr"/>
-          </a:p>
-        </p:txBody>
-      </p:sp>
-      <p:sp>
-        <p:nvSpPr>
-          <p:cNvPr id="9" name="TextBox 8"/>
-          <p:cNvSpPr txBox="1"/>
-          <p:nvPr/>
-        </p:nvSpPr>
-        <p:spPr>
-          <a:xfrm>
-            <a:off x="658368" y="3699316"/>
-            <a:ext cx="10874959" cy="198120"/>
-          </a:xfrm>
-          <a:prstGeom prst="rect">
-            <a:avLst/>
-          </a:prstGeom>
-          <a:noFill/>
-        </p:spPr>
-        <p:txBody>
-          <a:bodyPr wrap="square" lIns="0" rIns="0" tIns="0" bIns="0">
-            <a:normAutofit/>
-          </a:bodyPr>
-          <a:lstStyle/>
-          <a:p>
-            <a:r>
-              <a:rPr sz="1200">
-                <a:solidFill>
-                  <a:srgbClr val="14161A"/>
-                </a:solidFill>
-                <a:latin typeface="Consolas"/>
-              </a:rPr>
-              <a:t>studio.sh</a:t>
-            </a:r>
-          </a:p>
-        </p:txBody>
-      </p:sp>
-      <p:sp>
-        <p:nvSpPr>
-          <p:cNvPr id="10" name="TextBox 9"/>
-          <p:cNvSpPr txBox="1"/>
-          <p:nvPr/>
-        </p:nvSpPr>
-        <p:spPr>
-          <a:xfrm>
-            <a:off x="548640" y="4610668"/>
-            <a:ext cx="11094415" cy="922020"/>
+            <a:off x="548640" y="3010821"/>
+            <a:ext cx="5318607" cy="1536699"/>
           </a:xfrm>
           <a:prstGeom prst="rect">
             <a:avLst/>
@@ -4800,7 +4823,7 @@
               </a:spcAft>
             </a:pPr>
             <a:r>
-              <a:rPr sz="1400">
+              <a:rPr sz="1750">
                 <a:solidFill>
                   <a:srgbClr val="1F3D63"/>
                 </a:solidFill>
@@ -4809,13 +4832,13 @@
               <a:t>•  </a:t>
             </a:r>
             <a:r>
-              <a:rPr sz="1400" b="0" i="0">
+              <a:rPr sz="1750" b="0" i="0">
                 <a:solidFill>
                   <a:srgbClr val="14161A"/>
                 </a:solidFill>
                 <a:latin typeface="IBM Plex Sans"/>
               </a:rPr>
-              <a:t>Installs dependencies, builds frontend, opens browser</a:t>
+              <a:t>Upload file, URL, or paste text</a:t>
             </a:r>
           </a:p>
           <a:p>
@@ -4825,7 +4848,7 @@
               </a:spcAft>
             </a:pPr>
             <a:r>
-              <a:rPr sz="1400">
+              <a:rPr sz="1750">
                 <a:solidFill>
                   <a:srgbClr val="1F3D63"/>
                 </a:solidFill>
@@ -4834,13 +4857,13 @@
               <a:t>•  </a:t>
             </a:r>
             <a:r>
-              <a:rPr sz="1400" b="0" i="0">
+              <a:rPr sz="1750" b="0" i="0">
                 <a:solidFill>
                   <a:srgbClr val="14161A"/>
                 </a:solidFill>
                 <a:latin typeface="IBM Plex Sans"/>
               </a:rPr>
-              <a:t>Default: http://127.0.0.1:8899</a:t>
+              <a:t>Free web research agent included</a:t>
             </a:r>
           </a:p>
           <a:p>
@@ -4850,7 +4873,7 @@
               </a:spcAft>
             </a:pPr>
             <a:r>
-              <a:rPr sz="1400">
+              <a:rPr sz="1750">
                 <a:solidFill>
                   <a:srgbClr val="1F3D63"/>
                 </a:solidFill>
@@ -4859,13 +4882,170 @@
               <a:t>•  </a:t>
             </a:r>
             <a:r>
-              <a:rPr sz="1400" b="0" i="0">
+              <a:rPr sz="1750" b="0" i="0">
                 <a:solidFill>
                   <a:srgbClr val="14161A"/>
                 </a:solidFill>
                 <a:latin typeface="IBM Plex Sans"/>
               </a:rPr>
-              <a:t>Prerequisites: uv, Node 22+, npm</a:t>
+              <a:t>Hybrid BM25 + dense retrieval</a:t>
+            </a:r>
+          </a:p>
+          <a:p>
+            <a:pPr marL="320040" indent="-228600">
+              <a:spcAft>
+                <a:spcPts val="600"/>
+              </a:spcAft>
+            </a:pPr>
+            <a:r>
+              <a:rPr sz="1750">
+                <a:solidFill>
+                  <a:srgbClr val="1F3D63"/>
+                </a:solidFill>
+                <a:latin typeface="IBM Plex Sans"/>
+              </a:rPr>
+              <a:t>•  </a:t>
+            </a:r>
+            <a:r>
+              <a:rPr sz="1750" b="0" i="0">
+                <a:solidFill>
+                  <a:srgbClr val="14161A"/>
+                </a:solidFill>
+                <a:latin typeface="IBM Plex Sans"/>
+              </a:rPr>
+              <a:t>Automatic chunking at 1000 chars</a:t>
+            </a:r>
+          </a:p>
+        </p:txBody>
+      </p:sp>
+      <p:sp>
+        <p:nvSpPr>
+          <p:cNvPr id="6" name="TextBox 5"/>
+          <p:cNvSpPr txBox="1"/>
+          <p:nvPr/>
+        </p:nvSpPr>
+        <p:spPr>
+          <a:xfrm>
+            <a:off x="6324447" y="2586831"/>
+            <a:ext cx="5318607" cy="350837"/>
+          </a:xfrm>
+          <a:prstGeom prst="rect">
+            <a:avLst/>
+          </a:prstGeom>
+          <a:noFill/>
+        </p:spPr>
+        <p:txBody>
+          <a:bodyPr wrap="square" lIns="0" rIns="0" tIns="0" bIns="0">
+            <a:normAutofit/>
+          </a:bodyPr>
+          <a:lstStyle/>
+          <a:p>
+            <a:r>
+              <a:rPr sz="2125" b="1" i="0">
+                <a:solidFill>
+                  <a:srgbClr val="14161A"/>
+                </a:solidFill>
+                <a:latin typeface="IBM Plex Sans"/>
+              </a:rPr>
+              <a:t>Generate Artifacts</a:t>
+            </a:r>
+          </a:p>
+        </p:txBody>
+      </p:sp>
+      <p:sp>
+        <p:nvSpPr>
+          <p:cNvPr id="7" name="TextBox 6"/>
+          <p:cNvSpPr txBox="1"/>
+          <p:nvPr/>
+        </p:nvSpPr>
+        <p:spPr>
+          <a:xfrm>
+            <a:off x="6324447" y="3010821"/>
+            <a:ext cx="5318607" cy="1441450"/>
+          </a:xfrm>
+          <a:prstGeom prst="rect">
+            <a:avLst/>
+          </a:prstGeom>
+          <a:noFill/>
+        </p:spPr>
+        <p:txBody>
+          <a:bodyPr wrap="square" lIns="0" rIns="0" tIns="0" bIns="0">
+            <a:normAutofit/>
+          </a:bodyPr>
+          <a:lstStyle/>
+          <a:p>
+            <a:pPr marL="320040" indent="-228600">
+              <a:spcAft>
+                <a:spcPts val="600"/>
+              </a:spcAft>
+            </a:pPr>
+            <a:r>
+              <a:rPr sz="1750">
+                <a:solidFill>
+                  <a:srgbClr val="1F3D63"/>
+                </a:solidFill>
+                <a:latin typeface="IBM Plex Sans"/>
+              </a:rPr>
+              <a:t>•  </a:t>
+            </a:r>
+            <a:r>
+              <a:rPr sz="1750" b="0" i="0">
+                <a:solidFill>
+                  <a:srgbClr val="14161A"/>
+                </a:solidFill>
+                <a:latin typeface="IBM Plex Sans"/>
+              </a:rPr>
+              <a:t>Chat with grounded, cited answers</a:t>
+            </a:r>
+          </a:p>
+          <a:p>
+            <a:pPr marL="320040" indent="-228600">
+              <a:spcAft>
+                <a:spcPts val="600"/>
+              </a:spcAft>
+            </a:pPr>
+            <a:r>
+              <a:rPr sz="1750">
+                <a:solidFill>
+                  <a:srgbClr val="1F3D63"/>
+                </a:solidFill>
+                <a:latin typeface="IBM Plex Sans"/>
+              </a:rPr>
+              <a:t>•  </a:t>
+            </a:r>
+            <a:r>
+              <a:rPr sz="1750" b="0" i="0">
+                <a:solidFill>
+                  <a:srgbClr val="14161A"/>
+                </a:solidFill>
+                <a:latin typeface="IBM Plex Sans"/>
+              </a:rPr>
+              <a:t>5 one-click guides (briefing, FAQ, timeline)</a:t>
+            </a:r>
+          </a:p>
+          <a:p>
+            <a:pPr marL="320040" indent="-228600">
+              <a:spcAft>
+                <a:spcPts val="600"/>
+              </a:spcAft>
+            </a:pPr>
+            <a:r>
+              <a:rPr sz="1750">
+                <a:solidFill>
+                  <a:srgbClr val="1F3D63"/>
+                </a:solidFill>
+                <a:latin typeface="IBM Plex Sans"/>
+              </a:rPr>
+              <a:t>•  </a:t>
+            </a:r>
+            <a:r>
+              <a:rPr sz="1750" b="0" i="0">
+                <a:solidFill>
+                  <a:srgbClr val="14161A"/>
+                </a:solidFill>
+                <a:latin typeface="IBM Plex Sans"/>
+              </a:rPr>
+              <a:t>6 artifact kinds: deck, doc, sheet, diagram, infographic, podcast</a:t>
             </a:r>
           </a:p>
         </p:txBody>
@@ -4919,13 +5099,13 @@
           <a:lstStyle/>
           <a:p>
             <a:r>
-              <a:rPr sz="2600" b="1" i="0">
+              <a:rPr sz="3000" b="1" i="0">
                 <a:solidFill>
                   <a:srgbClr val="14161A"/>
                 </a:solidFill>
                 <a:latin typeface="IBM Plex Sans"/>
               </a:rPr>
-              <a:t>Set Up Providers, Storage, and Secrets</a:t>
+              <a:t>Keep Text Legible at Any Scale</a:t>
             </a:r>
           </a:p>
         </p:txBody>
@@ -4939,7 +5119,7 @@
         <p:spPr>
           <a:xfrm>
             <a:off x="548640" y="1042416"/>
-            <a:ext cx="11094415" cy="25603"/>
+            <a:ext cx="1097280" cy="25603"/>
           </a:xfrm>
           <a:prstGeom prst="rect">
             <a:avLst/>
@@ -4982,7 +5162,7 @@
         </p:nvSpPr>
         <p:spPr>
           <a:xfrm>
-            <a:off x="548640" y="2596263"/>
+            <a:off x="548640" y="2095713"/>
             <a:ext cx="11094415" cy="1920874"/>
           </a:xfrm>
           <a:prstGeom prst="rect">
@@ -5017,7 +5197,7 @@
                 </a:solidFill>
                 <a:latin typeface="IBM Plex Sans"/>
               </a:rPr>
-              <a:t>Generation: ollama, llama-server, lmstudio, openai, anthropic, gemini</a:t>
+              <a:t>Measured autofit: real text extents via FreeType against actual fonts</a:t>
             </a:r>
           </a:p>
           <a:p>
@@ -5042,7 +5222,7 @@
                 </a:solidFill>
                 <a:latin typeface="IBM Plex Sans"/>
               </a:rPr>
-              <a:t>Storage: SQLite (default) or Postgres via DOCLOOM_DB_URL</a:t>
+              <a:t>WCAG 2.x contrast ratio checking: 4.5:1 for normal text</a:t>
             </a:r>
           </a:p>
           <a:p>
@@ -5067,7 +5247,7 @@
                 </a:solidFill>
                 <a:latin typeface="IBM Plex Sans"/>
               </a:rPr>
-              <a:t>Secrets: Fernet encryption, masked in API responses</a:t>
+              <a:t>Diagram legibility: labels never truncated, step down detail instead</a:t>
             </a:r>
           </a:p>
           <a:p>
@@ -5092,7 +5272,7 @@
                 </a:solidFill>
                 <a:latin typeface="IBM Plex Sans"/>
               </a:rPr>
-              <a:t>Optional extras: [pdf,diagrams] for engine; [podcast,ingest] for studio</a:t>
+              <a:t>Table hardening: fixed widths, repeating headers, split prevention</a:t>
             </a:r>
           </a:p>
           <a:p>
@@ -5117,7 +5297,129 @@
                 </a:solidFill>
                 <a:latin typeface="IBM Plex Sans"/>
               </a:rPr>
-              <a:t>Settings resolve: per-user â†’ global â†’ built-in defaults</a:t>
+              <a:t>Geometric QA: off-slide detection, overlap checks, font sprawl</a:t>
+            </a:r>
+          </a:p>
+        </p:txBody>
+      </p:sp>
+      <p:sp>
+        <p:nvSpPr>
+          <p:cNvPr id="5" name="Rectangle 4"/>
+          <p:cNvSpPr/>
+          <p:nvPr/>
+        </p:nvSpPr>
+        <p:spPr>
+          <a:xfrm>
+            <a:off x="548640" y="4162892"/>
+            <a:ext cx="9430252" cy="1058037"/>
+          </a:xfrm>
+          <a:prstGeom prst="rect">
+            <a:avLst/>
+          </a:prstGeom>
+          <a:solidFill>
+            <a:srgbClr val="DBE3ED"/>
+          </a:solidFill>
+          <a:ln>
+            <a:noFill/>
+          </a:ln>
+          <a:effectLst/>
+        </p:spPr>
+        <p:style>
+          <a:lnRef idx="1">
+            <a:schemeClr val="accent1"/>
+          </a:lnRef>
+          <a:fillRef idx="3">
+            <a:schemeClr val="accent1"/>
+          </a:fillRef>
+          <a:effectRef idx="2">
+            <a:schemeClr val="accent1"/>
+          </a:effectRef>
+          <a:fontRef idx="minor">
+            <a:schemeClr val="lt1"/>
+          </a:fontRef>
+        </p:style>
+        <p:txBody>
+          <a:bodyPr rtlCol="0" anchor="ctr"/>
+          <a:lstStyle/>
+          <a:p>
+            <a:pPr algn="ctr"/>
+          </a:p>
+        </p:txBody>
+      </p:sp>
+      <p:sp>
+        <p:nvSpPr>
+          <p:cNvPr id="6" name="Rectangle 5"/>
+          <p:cNvSpPr/>
+          <p:nvPr/>
+        </p:nvSpPr>
+        <p:spPr>
+          <a:xfrm>
+            <a:off x="548640" y="4162892"/>
+            <a:ext cx="91440" cy="1058037"/>
+          </a:xfrm>
+          <a:prstGeom prst="rect">
+            <a:avLst/>
+          </a:prstGeom>
+          <a:solidFill>
+            <a:srgbClr val="2F62A0"/>
+          </a:solidFill>
+          <a:ln>
+            <a:noFill/>
+          </a:ln>
+          <a:effectLst/>
+        </p:spPr>
+        <p:style>
+          <a:lnRef idx="1">
+            <a:schemeClr val="accent1"/>
+          </a:lnRef>
+          <a:fillRef idx="3">
+            <a:schemeClr val="accent1"/>
+          </a:fillRef>
+          <a:effectRef idx="2">
+            <a:schemeClr val="accent1"/>
+          </a:effectRef>
+          <a:fontRef idx="minor">
+            <a:schemeClr val="lt1"/>
+          </a:fontRef>
+        </p:style>
+        <p:txBody>
+          <a:bodyPr rtlCol="0" anchor="ctr"/>
+          <a:lstStyle/>
+          <a:p>
+            <a:pPr algn="ctr"/>
+          </a:p>
+        </p:txBody>
+      </p:sp>
+      <p:sp>
+        <p:nvSpPr>
+          <p:cNvPr id="7" name="TextBox 6"/>
+          <p:cNvSpPr txBox="1"/>
+          <p:nvPr/>
+        </p:nvSpPr>
+        <p:spPr>
+          <a:xfrm>
+            <a:off x="859536" y="4382348"/>
+            <a:ext cx="8899900" cy="619125"/>
+          </a:xfrm>
+          <a:prstGeom prst="rect">
+            <a:avLst/>
+          </a:prstGeom>
+          <a:noFill/>
+        </p:spPr>
+        <p:txBody>
+          <a:bodyPr wrap="square" lIns="0" rIns="0" tIns="0" bIns="0">
+            <a:normAutofit/>
+          </a:bodyPr>
+          <a:lstStyle/>
+          <a:p>
+            <a:r>
+              <a:rPr sz="1875" b="1" i="0">
+                <a:solidFill>
+                  <a:srgbClr val="14161A"/>
+                </a:solidFill>
+                <a:latin typeface="IBM Plex Sans"/>
+              </a:rPr>
+              <a:t>Design principle: lint before render. Only error severity blocks a render; warnings help improve.</a:t>
             </a:r>
           </a:p>
         </p:txBody>
@@ -5171,13 +5473,13 @@
           <a:lstStyle/>
           <a:p>
             <a:r>
-              <a:rPr sz="2600" b="1" i="0">
+              <a:rPr sz="3000" b="1" i="0">
                 <a:solidFill>
                   <a:srgbClr val="14161A"/>
                 </a:solidFill>
                 <a:latin typeface="IBM Plex Sans"/>
               </a:rPr>
-              <a:t>Design Principles: Built for Reliability</a:t>
+              <a:t>Local-First, Offline-Ready, Multi-Tenant-Safe</a:t>
             </a:r>
           </a:p>
         </p:txBody>
@@ -5191,7 +5493,7 @@
         <p:spPr>
           <a:xfrm>
             <a:off x="548640" y="1042416"/>
-            <a:ext cx="11094415" cy="25603"/>
+            <a:ext cx="1097280" cy="25603"/>
           </a:xfrm>
           <a:prstGeom prst="rect">
             <a:avLst/>
@@ -5234,7 +5536,7 @@
         </p:nvSpPr>
         <p:spPr>
           <a:xfrm>
-            <a:off x="548640" y="2596263"/>
+            <a:off x="548640" y="2637666"/>
             <a:ext cx="11094415" cy="1920874"/>
           </a:xfrm>
           <a:prstGeom prst="rect">
@@ -5269,7 +5571,7 @@
                 </a:solidFill>
                 <a:latin typeface="IBM Plex Sans"/>
               </a:rPr>
-              <a:t>Validated IR, not code: LLM output is data, never executable</a:t>
+              <a:t>Runs fully offline against a local model (ollama, llama.cpp, etc.)</a:t>
             </a:r>
           </a:p>
           <a:p>
@@ -5294,7 +5596,7 @@
                 </a:solidFill>
                 <a:latin typeface="IBM Plex Sans"/>
               </a:rPr>
-              <a:t>Deterministic renderers: same input = same output, always</a:t>
+              <a:t>SQLite default, Postgres for scale</a:t>
             </a:r>
           </a:p>
           <a:p>
@@ -5319,7 +5621,7 @@
                 </a:solidFill>
                 <a:latin typeface="IBM Plex Sans"/>
               </a:rPr>
-              <a:t>Lint before render: findings can loop back to model</a:t>
+              <a:t>Session tokens stored only as SHA-256 hashes</a:t>
             </a:r>
           </a:p>
           <a:p>
@@ -5344,7 +5646,7 @@
                 </a:solidFill>
                 <a:latin typeface="IBM Plex Sans"/>
               </a:rPr>
-              <a:t>Nothing authored is lost: labels step down, never truncate</a:t>
+              <a:t>Cross-tenant access returns 404, not 403</a:t>
             </a:r>
           </a:p>
           <a:p>
@@ -5369,7 +5671,7 @@
                 </a:solidFill>
                 <a:latin typeface="IBM Plex Sans"/>
               </a:rPr>
-              <a:t>Graceful degradation: optional deps improve output, never crash</a:t>
+              <a:t>Secrets encrypted at rest with Fernet</a:t>
             </a:r>
           </a:p>
         </p:txBody>
@@ -5383,6 +5685,936 @@
 </file>
 
 <file path=ppt/slides/slide13.xml><?xml version="1.0" encoding="utf-8"?>
+<p:sld xmlns:a="http://schemas.openxmlformats.org/drawingml/2006/main" xmlns:p="http://schemas.openxmlformats.org/presentationml/2006/main" xmlns:r="http://schemas.openxmlformats.org/officeDocument/2006/relationships">
+  <p:cSld>
+    <p:bg>
+      <p:bgPr>
+        <a:solidFill>
+          <a:srgbClr val="F7F8FA"/>
+        </a:solidFill>
+        <a:effectLst/>
+      </p:bgPr>
+    </p:bg>
+    <p:spTree>
+      <p:nvGrpSpPr>
+        <p:cNvPr id="1" name=""/>
+        <p:cNvGrpSpPr/>
+        <p:nvPr/>
+      </p:nvGrpSpPr>
+      <p:grpSpPr/>
+      <p:sp>
+        <p:nvSpPr>
+          <p:cNvPr id="2" name="TextBox 1"/>
+          <p:cNvSpPr txBox="1"/>
+          <p:nvPr/>
+        </p:nvSpPr>
+        <p:spPr>
+          <a:xfrm>
+            <a:off x="548640" y="384048"/>
+            <a:ext cx="11094415" cy="566928"/>
+          </a:xfrm>
+          <a:prstGeom prst="rect">
+            <a:avLst/>
+          </a:prstGeom>
+          <a:noFill/>
+        </p:spPr>
+        <p:txBody>
+          <a:bodyPr wrap="square" lIns="0" rIns="0" tIns="0" bIns="0">
+            <a:normAutofit/>
+          </a:bodyPr>
+          <a:lstStyle/>
+          <a:p>
+            <a:r>
+              <a:rPr sz="3000" b="1" i="0">
+                <a:solidFill>
+                  <a:srgbClr val="14161A"/>
+                </a:solidFill>
+                <a:latin typeface="IBM Plex Sans"/>
+              </a:rPr>
+              <a:t>One Command to Launch</a:t>
+            </a:r>
+          </a:p>
+        </p:txBody>
+      </p:sp>
+      <p:sp>
+        <p:nvSpPr>
+          <p:cNvPr id="3" name="Rectangle 2"/>
+          <p:cNvSpPr/>
+          <p:nvPr/>
+        </p:nvSpPr>
+        <p:spPr>
+          <a:xfrm>
+            <a:off x="548640" y="1042416"/>
+            <a:ext cx="1097280" cy="25603"/>
+          </a:xfrm>
+          <a:prstGeom prst="rect">
+            <a:avLst/>
+          </a:prstGeom>
+          <a:solidFill>
+            <a:srgbClr val="1F3D63"/>
+          </a:solidFill>
+          <a:ln>
+            <a:noFill/>
+          </a:ln>
+          <a:effectLst/>
+        </p:spPr>
+        <p:style>
+          <a:lnRef idx="1">
+            <a:schemeClr val="accent1"/>
+          </a:lnRef>
+          <a:fillRef idx="3">
+            <a:schemeClr val="accent1"/>
+          </a:fillRef>
+          <a:effectRef idx="2">
+            <a:schemeClr val="accent1"/>
+          </a:effectRef>
+          <a:fontRef idx="minor">
+            <a:schemeClr val="lt1"/>
+          </a:fontRef>
+        </p:style>
+        <p:txBody>
+          <a:bodyPr rtlCol="0" anchor="ctr"/>
+          <a:lstStyle/>
+          <a:p>
+            <a:pPr algn="ctr"/>
+          </a:p>
+        </p:txBody>
+      </p:sp>
+      <p:sp>
+        <p:nvSpPr>
+          <p:cNvPr id="4" name="TextBox 3"/>
+          <p:cNvSpPr txBox="1"/>
+          <p:nvPr/>
+        </p:nvSpPr>
+        <p:spPr>
+          <a:xfrm>
+            <a:off x="548640" y="2095256"/>
+            <a:ext cx="11094415" cy="322770"/>
+          </a:xfrm>
+          <a:prstGeom prst="rect">
+            <a:avLst/>
+          </a:prstGeom>
+          <a:noFill/>
+        </p:spPr>
+        <p:txBody>
+          <a:bodyPr wrap="square" lIns="0" rIns="0" tIns="0" bIns="0">
+            <a:normAutofit/>
+          </a:bodyPr>
+          <a:lstStyle/>
+          <a:p>
+            <a:r>
+              <a:rPr sz="1954" b="1" i="0">
+                <a:solidFill>
+                  <a:srgbClr val="14161A"/>
+                </a:solidFill>
+                <a:latin typeface="IBM Plex Sans"/>
+              </a:rPr>
+              <a:t>Windows (PowerShell)</a:t>
+            </a:r>
+          </a:p>
+        </p:txBody>
+      </p:sp>
+      <p:sp>
+        <p:nvSpPr>
+          <p:cNvPr id="5" name="Rectangle 4"/>
+          <p:cNvSpPr/>
+          <p:nvPr/>
+        </p:nvSpPr>
+        <p:spPr>
+          <a:xfrm>
+            <a:off x="548640" y="2491178"/>
+            <a:ext cx="11094415" cy="417576"/>
+          </a:xfrm>
+          <a:prstGeom prst="rect">
+            <a:avLst/>
+          </a:prstGeom>
+          <a:solidFill>
+            <a:srgbClr val="EBEEF3"/>
+          </a:solidFill>
+          <a:ln>
+            <a:noFill/>
+          </a:ln>
+          <a:effectLst/>
+        </p:spPr>
+        <p:style>
+          <a:lnRef idx="1">
+            <a:schemeClr val="accent1"/>
+          </a:lnRef>
+          <a:fillRef idx="3">
+            <a:schemeClr val="accent1"/>
+          </a:fillRef>
+          <a:effectRef idx="2">
+            <a:schemeClr val="accent1"/>
+          </a:effectRef>
+          <a:fontRef idx="minor">
+            <a:schemeClr val="lt1"/>
+          </a:fontRef>
+        </p:style>
+        <p:txBody>
+          <a:bodyPr rtlCol="0" anchor="ctr"/>
+          <a:lstStyle/>
+          <a:p>
+            <a:pPr algn="ctr"/>
+          </a:p>
+        </p:txBody>
+      </p:sp>
+      <p:sp>
+        <p:nvSpPr>
+          <p:cNvPr id="6" name="TextBox 5"/>
+          <p:cNvSpPr txBox="1"/>
+          <p:nvPr/>
+        </p:nvSpPr>
+        <p:spPr>
+          <a:xfrm>
+            <a:off x="658368" y="2600906"/>
+            <a:ext cx="10874959" cy="198120"/>
+          </a:xfrm>
+          <a:prstGeom prst="rect">
+            <a:avLst/>
+          </a:prstGeom>
+          <a:noFill/>
+        </p:spPr>
+        <p:txBody>
+          <a:bodyPr wrap="square" lIns="0" rIns="0" tIns="0" bIns="0">
+            <a:normAutofit/>
+          </a:bodyPr>
+          <a:lstStyle/>
+          <a:p>
+            <a:r>
+              <a:rPr sz="1200">
+                <a:solidFill>
+                  <a:srgbClr val="14161A"/>
+                </a:solidFill>
+                <a:latin typeface="Consolas"/>
+              </a:rPr>
+              <a:t>studio.ps1</a:t>
+            </a:r>
+          </a:p>
+        </p:txBody>
+      </p:sp>
+      <p:sp>
+        <p:nvSpPr>
+          <p:cNvPr id="7" name="TextBox 6"/>
+          <p:cNvSpPr txBox="1"/>
+          <p:nvPr/>
+        </p:nvSpPr>
+        <p:spPr>
+          <a:xfrm>
+            <a:off x="548640" y="3055058"/>
+            <a:ext cx="11094415" cy="322770"/>
+          </a:xfrm>
+          <a:prstGeom prst="rect">
+            <a:avLst/>
+          </a:prstGeom>
+          <a:noFill/>
+        </p:spPr>
+        <p:txBody>
+          <a:bodyPr wrap="square" lIns="0" rIns="0" tIns="0" bIns="0">
+            <a:normAutofit/>
+          </a:bodyPr>
+          <a:lstStyle/>
+          <a:p>
+            <a:r>
+              <a:rPr sz="1954" b="1" i="0">
+                <a:solidFill>
+                  <a:srgbClr val="14161A"/>
+                </a:solidFill>
+                <a:latin typeface="IBM Plex Sans"/>
+              </a:rPr>
+              <a:t>macOS / Linux / Git Bash</a:t>
+            </a:r>
+          </a:p>
+        </p:txBody>
+      </p:sp>
+      <p:sp>
+        <p:nvSpPr>
+          <p:cNvPr id="8" name="Rectangle 7"/>
+          <p:cNvSpPr/>
+          <p:nvPr/>
+        </p:nvSpPr>
+        <p:spPr>
+          <a:xfrm>
+            <a:off x="548640" y="3450981"/>
+            <a:ext cx="11094415" cy="417576"/>
+          </a:xfrm>
+          <a:prstGeom prst="rect">
+            <a:avLst/>
+          </a:prstGeom>
+          <a:solidFill>
+            <a:srgbClr val="EBEEF3"/>
+          </a:solidFill>
+          <a:ln>
+            <a:noFill/>
+          </a:ln>
+          <a:effectLst/>
+        </p:spPr>
+        <p:style>
+          <a:lnRef idx="1">
+            <a:schemeClr val="accent1"/>
+          </a:lnRef>
+          <a:fillRef idx="3">
+            <a:schemeClr val="accent1"/>
+          </a:fillRef>
+          <a:effectRef idx="2">
+            <a:schemeClr val="accent1"/>
+          </a:effectRef>
+          <a:fontRef idx="minor">
+            <a:schemeClr val="lt1"/>
+          </a:fontRef>
+        </p:style>
+        <p:txBody>
+          <a:bodyPr rtlCol="0" anchor="ctr"/>
+          <a:lstStyle/>
+          <a:p>
+            <a:pPr algn="ctr"/>
+          </a:p>
+        </p:txBody>
+      </p:sp>
+      <p:sp>
+        <p:nvSpPr>
+          <p:cNvPr id="9" name="TextBox 8"/>
+          <p:cNvSpPr txBox="1"/>
+          <p:nvPr/>
+        </p:nvSpPr>
+        <p:spPr>
+          <a:xfrm>
+            <a:off x="658368" y="3560709"/>
+            <a:ext cx="10874959" cy="198120"/>
+          </a:xfrm>
+          <a:prstGeom prst="rect">
+            <a:avLst/>
+          </a:prstGeom>
+          <a:noFill/>
+        </p:spPr>
+        <p:txBody>
+          <a:bodyPr wrap="square" lIns="0" rIns="0" tIns="0" bIns="0">
+            <a:normAutofit/>
+          </a:bodyPr>
+          <a:lstStyle/>
+          <a:p>
+            <a:r>
+              <a:rPr sz="1200">
+                <a:solidFill>
+                  <a:srgbClr val="14161A"/>
+                </a:solidFill>
+                <a:latin typeface="Consolas"/>
+              </a:rPr>
+              <a:t>studio.sh</a:t>
+            </a:r>
+          </a:p>
+        </p:txBody>
+      </p:sp>
+      <p:sp>
+        <p:nvSpPr>
+          <p:cNvPr id="10" name="TextBox 9"/>
+          <p:cNvSpPr txBox="1"/>
+          <p:nvPr/>
+        </p:nvSpPr>
+        <p:spPr>
+          <a:xfrm>
+            <a:off x="548640" y="4014861"/>
+            <a:ext cx="11094415" cy="1060322"/>
+          </a:xfrm>
+          <a:prstGeom prst="rect">
+            <a:avLst/>
+          </a:prstGeom>
+          <a:noFill/>
+        </p:spPr>
+        <p:txBody>
+          <a:bodyPr wrap="square" lIns="0" rIns="0" tIns="0" bIns="0">
+            <a:normAutofit/>
+          </a:bodyPr>
+          <a:lstStyle/>
+          <a:p>
+            <a:pPr marL="320040" indent="-228600">
+              <a:spcAft>
+                <a:spcPts val="600"/>
+              </a:spcAft>
+            </a:pPr>
+            <a:r>
+              <a:rPr sz="1609">
+                <a:solidFill>
+                  <a:srgbClr val="1F3D63"/>
+                </a:solidFill>
+                <a:latin typeface="IBM Plex Sans"/>
+              </a:rPr>
+              <a:t>•  </a:t>
+            </a:r>
+            <a:r>
+              <a:rPr sz="1609" b="0" i="0">
+                <a:solidFill>
+                  <a:srgbClr val="14161A"/>
+                </a:solidFill>
+                <a:latin typeface="IBM Plex Sans"/>
+              </a:rPr>
+              <a:t>Installs dependencies, builds frontend, opens browser</a:t>
+            </a:r>
+          </a:p>
+          <a:p>
+            <a:pPr marL="320040" indent="-228600">
+              <a:spcAft>
+                <a:spcPts val="600"/>
+              </a:spcAft>
+            </a:pPr>
+            <a:r>
+              <a:rPr sz="1609">
+                <a:solidFill>
+                  <a:srgbClr val="1F3D63"/>
+                </a:solidFill>
+                <a:latin typeface="IBM Plex Sans"/>
+              </a:rPr>
+              <a:t>•  </a:t>
+            </a:r>
+            <a:r>
+              <a:rPr sz="1609" b="0" i="0">
+                <a:solidFill>
+                  <a:srgbClr val="14161A"/>
+                </a:solidFill>
+                <a:latin typeface="IBM Plex Sans"/>
+              </a:rPr>
+              <a:t>Default: http://127.0.0.1:8899</a:t>
+            </a:r>
+          </a:p>
+          <a:p>
+            <a:pPr marL="320040" indent="-228600">
+              <a:spcAft>
+                <a:spcPts val="600"/>
+              </a:spcAft>
+            </a:pPr>
+            <a:r>
+              <a:rPr sz="1609">
+                <a:solidFill>
+                  <a:srgbClr val="1F3D63"/>
+                </a:solidFill>
+                <a:latin typeface="IBM Plex Sans"/>
+              </a:rPr>
+              <a:t>•  </a:t>
+            </a:r>
+            <a:r>
+              <a:rPr sz="1609" b="0" i="0">
+                <a:solidFill>
+                  <a:srgbClr val="14161A"/>
+                </a:solidFill>
+                <a:latin typeface="IBM Plex Sans"/>
+              </a:rPr>
+              <a:t>Prerequisites: uv, Node 22+, npm</a:t>
+            </a:r>
+          </a:p>
+        </p:txBody>
+      </p:sp>
+    </p:spTree>
+  </p:cSld>
+  <p:clrMapOvr>
+    <a:masterClrMapping/>
+  </p:clrMapOvr>
+</p:sld>
+</file>
+
+<file path=ppt/slides/slide14.xml><?xml version="1.0" encoding="utf-8"?>
+<p:sld xmlns:a="http://schemas.openxmlformats.org/drawingml/2006/main" xmlns:p="http://schemas.openxmlformats.org/presentationml/2006/main" xmlns:r="http://schemas.openxmlformats.org/officeDocument/2006/relationships">
+  <p:cSld>
+    <p:bg>
+      <p:bgPr>
+        <a:solidFill>
+          <a:srgbClr val="F7F8FA"/>
+        </a:solidFill>
+        <a:effectLst/>
+      </p:bgPr>
+    </p:bg>
+    <p:spTree>
+      <p:nvGrpSpPr>
+        <p:cNvPr id="1" name=""/>
+        <p:cNvGrpSpPr/>
+        <p:nvPr/>
+      </p:nvGrpSpPr>
+      <p:grpSpPr/>
+      <p:sp>
+        <p:nvSpPr>
+          <p:cNvPr id="2" name="TextBox 1"/>
+          <p:cNvSpPr txBox="1"/>
+          <p:nvPr/>
+        </p:nvSpPr>
+        <p:spPr>
+          <a:xfrm>
+            <a:off x="548640" y="384048"/>
+            <a:ext cx="11094415" cy="566928"/>
+          </a:xfrm>
+          <a:prstGeom prst="rect">
+            <a:avLst/>
+          </a:prstGeom>
+          <a:noFill/>
+        </p:spPr>
+        <p:txBody>
+          <a:bodyPr wrap="square" lIns="0" rIns="0" tIns="0" bIns="0">
+            <a:normAutofit/>
+          </a:bodyPr>
+          <a:lstStyle/>
+          <a:p>
+            <a:r>
+              <a:rPr sz="3000" b="1" i="0">
+                <a:solidFill>
+                  <a:srgbClr val="14161A"/>
+                </a:solidFill>
+                <a:latin typeface="IBM Plex Sans"/>
+              </a:rPr>
+              <a:t>Set Up Providers, Storage, and Secrets</a:t>
+            </a:r>
+          </a:p>
+        </p:txBody>
+      </p:sp>
+      <p:sp>
+        <p:nvSpPr>
+          <p:cNvPr id="3" name="Rectangle 2"/>
+          <p:cNvSpPr/>
+          <p:nvPr/>
+        </p:nvSpPr>
+        <p:spPr>
+          <a:xfrm>
+            <a:off x="548640" y="1042416"/>
+            <a:ext cx="1097280" cy="25603"/>
+          </a:xfrm>
+          <a:prstGeom prst="rect">
+            <a:avLst/>
+          </a:prstGeom>
+          <a:solidFill>
+            <a:srgbClr val="1F3D63"/>
+          </a:solidFill>
+          <a:ln>
+            <a:noFill/>
+          </a:ln>
+          <a:effectLst/>
+        </p:spPr>
+        <p:style>
+          <a:lnRef idx="1">
+            <a:schemeClr val="accent1"/>
+          </a:lnRef>
+          <a:fillRef idx="3">
+            <a:schemeClr val="accent1"/>
+          </a:fillRef>
+          <a:effectRef idx="2">
+            <a:schemeClr val="accent1"/>
+          </a:effectRef>
+          <a:fontRef idx="minor">
+            <a:schemeClr val="lt1"/>
+          </a:fontRef>
+        </p:style>
+        <p:txBody>
+          <a:bodyPr rtlCol="0" anchor="ctr"/>
+          <a:lstStyle/>
+          <a:p>
+            <a:pPr algn="ctr"/>
+          </a:p>
+        </p:txBody>
+      </p:sp>
+      <p:sp>
+        <p:nvSpPr>
+          <p:cNvPr id="4" name="TextBox 3"/>
+          <p:cNvSpPr txBox="1"/>
+          <p:nvPr/>
+        </p:nvSpPr>
+        <p:spPr>
+          <a:xfrm>
+            <a:off x="548640" y="2637666"/>
+            <a:ext cx="11094415" cy="1920874"/>
+          </a:xfrm>
+          <a:prstGeom prst="rect">
+            <a:avLst/>
+          </a:prstGeom>
+          <a:noFill/>
+        </p:spPr>
+        <p:txBody>
+          <a:bodyPr wrap="square" lIns="0" rIns="0" tIns="0" bIns="0">
+            <a:normAutofit/>
+          </a:bodyPr>
+          <a:lstStyle/>
+          <a:p>
+            <a:pPr marL="320040" indent="-228600">
+              <a:spcAft>
+                <a:spcPts val="600"/>
+              </a:spcAft>
+            </a:pPr>
+            <a:r>
+              <a:rPr sz="1750">
+                <a:solidFill>
+                  <a:srgbClr val="1F3D63"/>
+                </a:solidFill>
+                <a:latin typeface="IBM Plex Sans"/>
+              </a:rPr>
+              <a:t>•  </a:t>
+            </a:r>
+            <a:r>
+              <a:rPr sz="1750" b="0" i="0">
+                <a:solidFill>
+                  <a:srgbClr val="14161A"/>
+                </a:solidFill>
+                <a:latin typeface="IBM Plex Sans"/>
+              </a:rPr>
+              <a:t>Generation: ollama, llama-server, lmstudio, openai, anthropic, gemini</a:t>
+            </a:r>
+          </a:p>
+          <a:p>
+            <a:pPr marL="320040" indent="-228600">
+              <a:spcAft>
+                <a:spcPts val="600"/>
+              </a:spcAft>
+            </a:pPr>
+            <a:r>
+              <a:rPr sz="1750">
+                <a:solidFill>
+                  <a:srgbClr val="1F3D63"/>
+                </a:solidFill>
+                <a:latin typeface="IBM Plex Sans"/>
+              </a:rPr>
+              <a:t>•  </a:t>
+            </a:r>
+            <a:r>
+              <a:rPr sz="1750" b="0" i="0">
+                <a:solidFill>
+                  <a:srgbClr val="14161A"/>
+                </a:solidFill>
+                <a:latin typeface="IBM Plex Sans"/>
+              </a:rPr>
+              <a:t>Storage: SQLite (default) or Postgres via DOCLOOM_DB_URL</a:t>
+            </a:r>
+          </a:p>
+          <a:p>
+            <a:pPr marL="320040" indent="-228600">
+              <a:spcAft>
+                <a:spcPts val="600"/>
+              </a:spcAft>
+            </a:pPr>
+            <a:r>
+              <a:rPr sz="1750">
+                <a:solidFill>
+                  <a:srgbClr val="1F3D63"/>
+                </a:solidFill>
+                <a:latin typeface="IBM Plex Sans"/>
+              </a:rPr>
+              <a:t>•  </a:t>
+            </a:r>
+            <a:r>
+              <a:rPr sz="1750" b="0" i="0">
+                <a:solidFill>
+                  <a:srgbClr val="14161A"/>
+                </a:solidFill>
+                <a:latin typeface="IBM Plex Sans"/>
+              </a:rPr>
+              <a:t>Secrets: Fernet encryption, masked in API responses</a:t>
+            </a:r>
+          </a:p>
+          <a:p>
+            <a:pPr marL="320040" indent="-228600">
+              <a:spcAft>
+                <a:spcPts val="600"/>
+              </a:spcAft>
+            </a:pPr>
+            <a:r>
+              <a:rPr sz="1750">
+                <a:solidFill>
+                  <a:srgbClr val="1F3D63"/>
+                </a:solidFill>
+                <a:latin typeface="IBM Plex Sans"/>
+              </a:rPr>
+              <a:t>•  </a:t>
+            </a:r>
+            <a:r>
+              <a:rPr sz="1750" b="0" i="0">
+                <a:solidFill>
+                  <a:srgbClr val="14161A"/>
+                </a:solidFill>
+                <a:latin typeface="IBM Plex Sans"/>
+              </a:rPr>
+              <a:t>Optional extras: [pdf,diagrams] for engine; [podcast,ingest] for studio</a:t>
+            </a:r>
+          </a:p>
+          <a:p>
+            <a:pPr marL="320040" indent="-228600">
+              <a:spcAft>
+                <a:spcPts val="600"/>
+              </a:spcAft>
+            </a:pPr>
+            <a:r>
+              <a:rPr sz="1750">
+                <a:solidFill>
+                  <a:srgbClr val="1F3D63"/>
+                </a:solidFill>
+                <a:latin typeface="IBM Plex Sans"/>
+              </a:rPr>
+              <a:t>•  </a:t>
+            </a:r>
+            <a:r>
+              <a:rPr sz="1750" b="0" i="0">
+                <a:solidFill>
+                  <a:srgbClr val="14161A"/>
+                </a:solidFill>
+                <a:latin typeface="IBM Plex Sans"/>
+              </a:rPr>
+              <a:t>Settings resolve: per-user → global → built-in defaults</a:t>
+            </a:r>
+          </a:p>
+        </p:txBody>
+      </p:sp>
+    </p:spTree>
+  </p:cSld>
+  <p:clrMapOvr>
+    <a:masterClrMapping/>
+  </p:clrMapOvr>
+</p:sld>
+</file>
+
+<file path=ppt/slides/slide15.xml><?xml version="1.0" encoding="utf-8"?>
+<p:sld xmlns:a="http://schemas.openxmlformats.org/drawingml/2006/main" xmlns:p="http://schemas.openxmlformats.org/presentationml/2006/main" xmlns:r="http://schemas.openxmlformats.org/officeDocument/2006/relationships">
+  <p:cSld>
+    <p:bg>
+      <p:bgPr>
+        <a:solidFill>
+          <a:srgbClr val="F7F8FA"/>
+        </a:solidFill>
+        <a:effectLst/>
+      </p:bgPr>
+    </p:bg>
+    <p:spTree>
+      <p:nvGrpSpPr>
+        <p:cNvPr id="1" name=""/>
+        <p:cNvGrpSpPr/>
+        <p:nvPr/>
+      </p:nvGrpSpPr>
+      <p:grpSpPr/>
+      <p:sp>
+        <p:nvSpPr>
+          <p:cNvPr id="2" name="TextBox 1"/>
+          <p:cNvSpPr txBox="1"/>
+          <p:nvPr/>
+        </p:nvSpPr>
+        <p:spPr>
+          <a:xfrm>
+            <a:off x="548640" y="384048"/>
+            <a:ext cx="11094415" cy="566928"/>
+          </a:xfrm>
+          <a:prstGeom prst="rect">
+            <a:avLst/>
+          </a:prstGeom>
+          <a:noFill/>
+        </p:spPr>
+        <p:txBody>
+          <a:bodyPr wrap="square" lIns="0" rIns="0" tIns="0" bIns="0">
+            <a:normAutofit/>
+          </a:bodyPr>
+          <a:lstStyle/>
+          <a:p>
+            <a:r>
+              <a:rPr sz="3000" b="1" i="0">
+                <a:solidFill>
+                  <a:srgbClr val="14161A"/>
+                </a:solidFill>
+                <a:latin typeface="IBM Plex Sans"/>
+              </a:rPr>
+              <a:t>Design Principles: Built for Reliability</a:t>
+            </a:r>
+          </a:p>
+        </p:txBody>
+      </p:sp>
+      <p:sp>
+        <p:nvSpPr>
+          <p:cNvPr id="3" name="Rectangle 2"/>
+          <p:cNvSpPr/>
+          <p:nvPr/>
+        </p:nvSpPr>
+        <p:spPr>
+          <a:xfrm>
+            <a:off x="548640" y="1042416"/>
+            <a:ext cx="1097280" cy="25603"/>
+          </a:xfrm>
+          <a:prstGeom prst="rect">
+            <a:avLst/>
+          </a:prstGeom>
+          <a:solidFill>
+            <a:srgbClr val="1F3D63"/>
+          </a:solidFill>
+          <a:ln>
+            <a:noFill/>
+          </a:ln>
+          <a:effectLst/>
+        </p:spPr>
+        <p:style>
+          <a:lnRef idx="1">
+            <a:schemeClr val="accent1"/>
+          </a:lnRef>
+          <a:fillRef idx="3">
+            <a:schemeClr val="accent1"/>
+          </a:fillRef>
+          <a:effectRef idx="2">
+            <a:schemeClr val="accent1"/>
+          </a:effectRef>
+          <a:fontRef idx="minor">
+            <a:schemeClr val="lt1"/>
+          </a:fontRef>
+        </p:style>
+        <p:txBody>
+          <a:bodyPr rtlCol="0" anchor="ctr"/>
+          <a:lstStyle/>
+          <a:p>
+            <a:pPr algn="ctr"/>
+          </a:p>
+        </p:txBody>
+      </p:sp>
+      <p:sp>
+        <p:nvSpPr>
+          <p:cNvPr id="4" name="TextBox 3"/>
+          <p:cNvSpPr txBox="1"/>
+          <p:nvPr/>
+        </p:nvSpPr>
+        <p:spPr>
+          <a:xfrm>
+            <a:off x="548640" y="2637666"/>
+            <a:ext cx="11094415" cy="1920874"/>
+          </a:xfrm>
+          <a:prstGeom prst="rect">
+            <a:avLst/>
+          </a:prstGeom>
+          <a:noFill/>
+        </p:spPr>
+        <p:txBody>
+          <a:bodyPr wrap="square" lIns="0" rIns="0" tIns="0" bIns="0">
+            <a:normAutofit/>
+          </a:bodyPr>
+          <a:lstStyle/>
+          <a:p>
+            <a:pPr marL="320040" indent="-228600">
+              <a:spcAft>
+                <a:spcPts val="600"/>
+              </a:spcAft>
+            </a:pPr>
+            <a:r>
+              <a:rPr sz="1750">
+                <a:solidFill>
+                  <a:srgbClr val="1F3D63"/>
+                </a:solidFill>
+                <a:latin typeface="IBM Plex Sans"/>
+              </a:rPr>
+              <a:t>•  </a:t>
+            </a:r>
+            <a:r>
+              <a:rPr sz="1750" b="0" i="0">
+                <a:solidFill>
+                  <a:srgbClr val="14161A"/>
+                </a:solidFill>
+                <a:latin typeface="IBM Plex Sans"/>
+              </a:rPr>
+              <a:t>Validated IR, not code: LLM output is data, never executable</a:t>
+            </a:r>
+          </a:p>
+          <a:p>
+            <a:pPr marL="320040" indent="-228600">
+              <a:spcAft>
+                <a:spcPts val="600"/>
+              </a:spcAft>
+            </a:pPr>
+            <a:r>
+              <a:rPr sz="1750">
+                <a:solidFill>
+                  <a:srgbClr val="1F3D63"/>
+                </a:solidFill>
+                <a:latin typeface="IBM Plex Sans"/>
+              </a:rPr>
+              <a:t>•  </a:t>
+            </a:r>
+            <a:r>
+              <a:rPr sz="1750" b="0" i="0">
+                <a:solidFill>
+                  <a:srgbClr val="14161A"/>
+                </a:solidFill>
+                <a:latin typeface="IBM Plex Sans"/>
+              </a:rPr>
+              <a:t>Deterministic renderers: same input = same output, always</a:t>
+            </a:r>
+          </a:p>
+          <a:p>
+            <a:pPr marL="320040" indent="-228600">
+              <a:spcAft>
+                <a:spcPts val="600"/>
+              </a:spcAft>
+            </a:pPr>
+            <a:r>
+              <a:rPr sz="1750">
+                <a:solidFill>
+                  <a:srgbClr val="1F3D63"/>
+                </a:solidFill>
+                <a:latin typeface="IBM Plex Sans"/>
+              </a:rPr>
+              <a:t>•  </a:t>
+            </a:r>
+            <a:r>
+              <a:rPr sz="1750" b="0" i="0">
+                <a:solidFill>
+                  <a:srgbClr val="14161A"/>
+                </a:solidFill>
+                <a:latin typeface="IBM Plex Sans"/>
+              </a:rPr>
+              <a:t>Lint before render: findings can loop back to model</a:t>
+            </a:r>
+          </a:p>
+          <a:p>
+            <a:pPr marL="320040" indent="-228600">
+              <a:spcAft>
+                <a:spcPts val="600"/>
+              </a:spcAft>
+            </a:pPr>
+            <a:r>
+              <a:rPr sz="1750">
+                <a:solidFill>
+                  <a:srgbClr val="1F3D63"/>
+                </a:solidFill>
+                <a:latin typeface="IBM Plex Sans"/>
+              </a:rPr>
+              <a:t>•  </a:t>
+            </a:r>
+            <a:r>
+              <a:rPr sz="1750" b="0" i="0">
+                <a:solidFill>
+                  <a:srgbClr val="14161A"/>
+                </a:solidFill>
+                <a:latin typeface="IBM Plex Sans"/>
+              </a:rPr>
+              <a:t>Nothing authored is lost: labels step down, never truncate</a:t>
+            </a:r>
+          </a:p>
+          <a:p>
+            <a:pPr marL="320040" indent="-228600">
+              <a:spcAft>
+                <a:spcPts val="600"/>
+              </a:spcAft>
+            </a:pPr>
+            <a:r>
+              <a:rPr sz="1750">
+                <a:solidFill>
+                  <a:srgbClr val="1F3D63"/>
+                </a:solidFill>
+                <a:latin typeface="IBM Plex Sans"/>
+              </a:rPr>
+              <a:t>•  </a:t>
+            </a:r>
+            <a:r>
+              <a:rPr sz="1750" b="0" i="0">
+                <a:solidFill>
+                  <a:srgbClr val="14161A"/>
+                </a:solidFill>
+                <a:latin typeface="IBM Plex Sans"/>
+              </a:rPr>
+              <a:t>Graceful degradation: optional deps improve output, never crash</a:t>
+            </a:r>
+          </a:p>
+        </p:txBody>
+      </p:sp>
+    </p:spTree>
+  </p:cSld>
+  <p:clrMapOvr>
+    <a:masterClrMapping/>
+  </p:clrMapOvr>
+</p:sld>
+</file>
+
+<file path=ppt/slides/slide16.xml><?xml version="1.0" encoding="utf-8"?>
 <p:sld xmlns:a="http://schemas.openxmlformats.org/drawingml/2006/main" xmlns:p="http://schemas.openxmlformats.org/presentationml/2006/main" xmlns:r="http://schemas.openxmlformats.org/officeDocument/2006/relationships">
   <p:cSld>
     <p:bg>
@@ -5402,13 +6634,48 @@
       <p:grpSpPr/>
       <p:sp>
         <p:nvSpPr>
-          <p:cNvPr id="2" name="Rectangle 1"/>
+          <p:cNvPr id="2" name="TextBox 1"/>
+          <p:cNvSpPr txBox="1"/>
+          <p:nvPr/>
+        </p:nvSpPr>
+        <p:spPr>
+          <a:xfrm>
+            <a:off x="7619695" y="274320"/>
+            <a:ext cx="4023360" cy="6309360"/>
+          </a:xfrm>
+          <a:prstGeom prst="rect">
+            <a:avLst/>
+          </a:prstGeom>
+          <a:noFill/>
+        </p:spPr>
+        <p:txBody>
+          <a:bodyPr wrap="square" lIns="0" rIns="0" tIns="0" bIns="0" anchor="ctr">
+            <a:normAutofit/>
+          </a:bodyPr>
+          <a:lstStyle/>
+          <a:p>
+            <a:pPr algn="r"/>
+            <a:r>
+              <a:rPr sz="15000" b="1" i="0">
+                <a:solidFill>
+                  <a:srgbClr val="3C5677"/>
+                </a:solidFill>
+                <a:latin typeface="IBM Plex Sans"/>
+              </a:rPr>
+              <a:t>01</a:t>
+            </a:r>
+          </a:p>
+        </p:txBody>
+      </p:sp>
+      <p:sp>
+        <p:nvSpPr>
+          <p:cNvPr id="3" name="Rectangle 2"/>
           <p:cNvSpPr/>
           <p:nvPr/>
         </p:nvSpPr>
         <p:spPr>
           <a:xfrm>
-            <a:off x="548640" y="2487168"/>
+            <a:off x="548640" y="2649474"/>
             <a:ext cx="1097280" cy="45720"/>
           </a:xfrm>
           <a:prstGeom prst="rect">
@@ -5446,14 +6713,14 @@
       </p:sp>
       <p:sp>
         <p:nvSpPr>
-          <p:cNvPr id="3" name="TextBox 2"/>
+          <p:cNvPr id="4" name="TextBox 3"/>
           <p:cNvSpPr txBox="1"/>
           <p:nvPr/>
         </p:nvSpPr>
         <p:spPr>
           <a:xfrm>
-            <a:off x="548640" y="2743200"/>
-            <a:ext cx="11094415" cy="1005840"/>
+            <a:off x="548640" y="2951226"/>
+            <a:ext cx="11094415" cy="822960"/>
           </a:xfrm>
           <a:prstGeom prst="rect">
             <a:avLst/>
@@ -5480,14 +6747,14 @@
       </p:sp>
       <p:sp>
         <p:nvSpPr>
-          <p:cNvPr id="4" name="TextBox 3"/>
+          <p:cNvPr id="5" name="TextBox 4"/>
           <p:cNvSpPr txBox="1"/>
           <p:nvPr/>
         </p:nvSpPr>
         <p:spPr>
           <a:xfrm>
-            <a:off x="548640" y="3886200"/>
-            <a:ext cx="11094415" cy="548640"/>
+            <a:off x="548640" y="3774186"/>
+            <a:ext cx="11094415" cy="434340"/>
           </a:xfrm>
           <a:prstGeom prst="rect">
             <a:avLst/>
@@ -5507,7 +6774,7 @@
                 </a:solidFill>
                 <a:latin typeface="IBM Plex Sans"/>
               </a:rPr>
-              <a:t>MIT License â€¢ Python 0.2.0 â€¢ 658+ Tests â€¢ Full-Stack SPA</a:t>
+              <a:t>MIT License • Python 0.2.0 • 658+ Tests • Full-Stack SPA</a:t>
             </a:r>
           </a:p>
         </p:txBody>
@@ -5561,7 +6828,7 @@
           <a:lstStyle/>
           <a:p>
             <a:r>
-              <a:rPr sz="2600" b="1" i="0">
+              <a:rPr sz="3000" b="1" i="0">
                 <a:solidFill>
                   <a:srgbClr val="14161A"/>
                 </a:solidFill>
@@ -5581,7 +6848,7 @@
         <p:spPr>
           <a:xfrm>
             <a:off x="548640" y="1042416"/>
-            <a:ext cx="11094415" cy="25603"/>
+            <a:ext cx="1097280" cy="25603"/>
           </a:xfrm>
           <a:prstGeom prst="rect">
             <a:avLst/>
@@ -5624,7 +6891,7 @@
         </p:nvSpPr>
         <p:spPr>
           <a:xfrm>
-            <a:off x="548640" y="2596263"/>
+            <a:off x="548640" y="2637666"/>
             <a:ext cx="11094415" cy="1920874"/>
           </a:xfrm>
           <a:prstGeom prst="rect">
@@ -5759,7 +7026,7 @@
                 </a:solidFill>
                 <a:latin typeface="IBM Plex Sans"/>
               </a:rPr>
-              <a:t>Users need native, editable formatsâ€”not rasterized images</a:t>
+              <a:t>Users need native, editable formats—not rasterized images</a:t>
             </a:r>
           </a:p>
         </p:txBody>
@@ -5813,7 +7080,7 @@
           <a:lstStyle/>
           <a:p>
             <a:r>
-              <a:rPr sz="2600" b="1" i="0">
+              <a:rPr sz="3000" b="1" i="0">
                 <a:solidFill>
                   <a:srgbClr val="14161A"/>
                 </a:solidFill>
@@ -5833,7 +7100,7 @@
         <p:spPr>
           <a:xfrm>
             <a:off x="548640" y="1042416"/>
-            <a:ext cx="11094415" cy="25603"/>
+            <a:ext cx="1097280" cy="25603"/>
           </a:xfrm>
           <a:prstGeom prst="rect">
             <a:avLst/>
@@ -5876,7 +7143,7 @@
         </p:nvSpPr>
         <p:spPr>
           <a:xfrm>
-            <a:off x="548640" y="2171250"/>
+            <a:off x="548640" y="2268592"/>
             <a:ext cx="11094415" cy="1536699"/>
           </a:xfrm>
           <a:prstGeom prst="rect">
@@ -5999,8 +7266,8 @@
         </p:nvSpPr>
         <p:spPr>
           <a:xfrm>
-            <a:off x="548640" y="4311454"/>
-            <a:ext cx="11094415" cy="792607"/>
+            <a:off x="548640" y="3951596"/>
+            <a:ext cx="9430252" cy="1058037"/>
           </a:xfrm>
           <a:prstGeom prst="rect">
             <a:avLst/>
@@ -6043,8 +7310,8 @@
         </p:nvSpPr>
         <p:spPr>
           <a:xfrm>
-            <a:off x="548640" y="4311454"/>
-            <a:ext cx="73152" cy="792607"/>
+            <a:off x="548640" y="3951596"/>
+            <a:ext cx="91440" cy="1058037"/>
           </a:xfrm>
           <a:prstGeom prst="rect">
             <a:avLst/>
@@ -6087,8 +7354,8 @@
         </p:nvSpPr>
         <p:spPr>
           <a:xfrm>
-            <a:off x="749808" y="4439470"/>
-            <a:ext cx="10765231" cy="536575"/>
+            <a:off x="859536" y="4171052"/>
+            <a:ext cx="8899900" cy="619125"/>
           </a:xfrm>
           <a:prstGeom prst="rect">
             <a:avLst/>
@@ -6102,13 +7369,13 @@
           <a:lstStyle/>
           <a:p>
             <a:r>
-              <a:rPr sz="1625" b="0" i="0">
+              <a:rPr sz="1875" b="1" i="0">
                 <a:solidFill>
                   <a:srgbClr val="14161A"/>
                 </a:solidFill>
                 <a:latin typeface="IBM Plex Sans"/>
               </a:rPr>
-              <a:t>The IR is deliberately non-recursive with plain tagged unionsâ€”shaped to survive real LLM structured-output constraints.</a:t>
+              <a:t>The IR is deliberately non-recursive with plain tagged unions—shaped to survive real LLM structured-output constraints.</a:t>
             </a:r>
           </a:p>
         </p:txBody>
@@ -6162,13 +7429,13 @@
           <a:lstStyle/>
           <a:p>
             <a:r>
-              <a:rPr sz="2600" b="1" i="0">
+              <a:rPr sz="3000" b="1" i="0">
                 <a:solidFill>
                   <a:srgbClr val="14161A"/>
                 </a:solidFill>
                 <a:latin typeface="IBM Plex Sans"/>
               </a:rPr>
-              <a:t>docloom architecture, end to end</a:t>
+              <a:t>Deliver the same file on every render</a:t>
             </a:r>
           </a:p>
         </p:txBody>
@@ -6182,7 +7449,7 @@
         <p:spPr>
           <a:xfrm>
             <a:off x="548640" y="1042416"/>
-            <a:ext cx="11094415" cy="25603"/>
+            <a:ext cx="1097280" cy="25603"/>
           </a:xfrm>
           <a:prstGeom prst="rect">
             <a:avLst/>
@@ -6217,75 +7484,16 @@
           </a:p>
         </p:txBody>
       </p:sp>
-      <p:pic>
-        <p:nvPicPr>
-          <p:cNvPr id="4" name="docloom:diagram:anon:9bd9a0f4086a" descr="docloom architecture (full)"/>
-          <p:cNvPicPr>
-            <a:picLocks noChangeAspect="1"/>
-          </p:cNvPicPr>
-          <p:nvPr/>
-        </p:nvPicPr>
-        <p:blipFill>
-          <a:blip r:embed="rId2"/>
-          <a:stretch>
-            <a:fillRect/>
-          </a:stretch>
-        </p:blipFill>
-        <p:spPr>
-          <a:xfrm>
-            <a:off x="548640" y="1298448"/>
-            <a:ext cx="11094415" cy="3536344"/>
-          </a:xfrm>
-          <a:prstGeom prst="rect">
-            <a:avLst/>
-          </a:prstGeom>
-        </p:spPr>
-      </p:pic>
-      <p:sp>
-        <p:nvSpPr>
-          <p:cNvPr id="5" name="TextBox 4"/>
+      <p:sp>
+        <p:nvSpPr>
+          <p:cNvPr id="4" name="TextBox 3"/>
           <p:cNvSpPr txBox="1"/>
           <p:nvPr/>
         </p:nvSpPr>
         <p:spPr>
           <a:xfrm>
-            <a:off x="548640" y="4871368"/>
-            <a:ext cx="11094415" cy="201168"/>
-          </a:xfrm>
-          <a:prstGeom prst="rect">
-            <a:avLst/>
-          </a:prstGeom>
-          <a:noFill/>
-        </p:spPr>
-        <p:txBody>
-          <a:bodyPr wrap="square">
-            <a:spAutoFit/>
-          </a:bodyPr>
-          <a:lstStyle/>
-          <a:p>
-            <a:pPr algn="ctr"/>
-            <a:r>
-              <a:rPr sz="1100" i="1">
-                <a:solidFill>
-                  <a:srgbClr val="5E6B7A"/>
-                </a:solidFill>
-                <a:latin typeface="IBM Plex Sans"/>
-              </a:rPr>
-              <a:t>The full studio + engine architecture: auth, retrieval, jobs, generation, versioned artifacts, and deterministic rendering.</a:t>
-            </a:r>
-          </a:p>
-        </p:txBody>
-      </p:sp>
-      <p:sp>
-        <p:nvSpPr>
-          <p:cNvPr id="6" name="TextBox 5"/>
-          <p:cNvSpPr txBox="1"/>
-          <p:nvPr/>
-        </p:nvSpPr>
-        <p:spPr>
-          <a:xfrm>
-            <a:off x="548640" y="5218840"/>
-            <a:ext cx="11094415" cy="922020"/>
+            <a:off x="548640" y="2333853"/>
+            <a:ext cx="11094415" cy="2476500"/>
           </a:xfrm>
           <a:prstGeom prst="rect">
             <a:avLst/>
@@ -6298,78 +7506,50 @@
           </a:bodyPr>
           <a:lstStyle/>
           <a:p>
-            <a:pPr marL="320040" indent="-228600">
-              <a:spcAft>
-                <a:spcPts val="600"/>
-              </a:spcAft>
-            </a:pPr>
-            <a:r>
-              <a:rPr sz="1400">
+            <a:pPr algn="ctr"/>
+            <a:r>
+              <a:rPr sz="15000" b="1" i="0">
                 <a:solidFill>
                   <a:srgbClr val="1F3D63"/>
                 </a:solidFill>
                 <a:latin typeface="IBM Plex Sans"/>
               </a:rPr>
-              <a:t>•  </a:t>
-            </a:r>
-            <a:r>
-              <a:rPr sz="1400" b="0" i="0">
-                <a:solidFill>
-                  <a:srgbClr val="14161A"/>
-                </a:solidFill>
-                <a:latin typeface="IBM Plex Sans"/>
-              </a:rPr>
-              <a:t>Sources are chunked, embedded, and ranked, so only the most relevant evidence reaches the model</a:t>
-            </a:r>
-          </a:p>
-          <a:p>
-            <a:pPr marL="320040" indent="-228600">
-              <a:spcAft>
-                <a:spcPts val="600"/>
-              </a:spcAft>
-            </a:pPr>
-            <a:r>
-              <a:rPr sz="1400">
-                <a:solidFill>
-                  <a:srgbClr val="1F3D63"/>
-                </a:solidFill>
-                <a:latin typeface="IBM Plex Sans"/>
-              </a:rPr>
-              <a:t>•  </a:t>
-            </a:r>
-            <a:r>
-              <a:rPr sz="1400" b="0" i="0">
-                <a:solidFill>
-                  <a:srgbClr val="14161A"/>
-                </a:solidFill>
-                <a:latin typeface="IBM Plex Sans"/>
-              </a:rPr>
-              <a:t>The model emits validated IR, never files; the linter checks layout and citations before any render</a:t>
-            </a:r>
-          </a:p>
-          <a:p>
-            <a:pPr marL="320040" indent="-228600">
-              <a:spcAft>
-                <a:spcPts val="600"/>
-              </a:spcAft>
-            </a:pPr>
-            <a:r>
-              <a:rPr sz="1400">
-                <a:solidFill>
-                  <a:srgbClr val="1F3D63"/>
-                </a:solidFill>
-                <a:latin typeface="IBM Plex Sans"/>
-              </a:rPr>
-              <a:t>•  </a:t>
-            </a:r>
-            <a:r>
-              <a:rPr sz="1400" b="0" i="0">
-                <a:solidFill>
-                  <a:srgbClr val="14161A"/>
-                </a:solidFill>
-                <a:latin typeface="IBM Plex Sans"/>
-              </a:rPr>
-              <a:t>Deterministic renderers turn one IR into all six formats with no lossy conversion</a:t>
+              <a:t>100%</a:t>
+            </a:r>
+          </a:p>
+        </p:txBody>
+      </p:sp>
+      <p:sp>
+        <p:nvSpPr>
+          <p:cNvPr id="5" name="TextBox 4"/>
+          <p:cNvSpPr txBox="1"/>
+          <p:nvPr/>
+        </p:nvSpPr>
+        <p:spPr>
+          <a:xfrm>
+            <a:off x="548640" y="4810353"/>
+            <a:ext cx="11094415" cy="370332"/>
+          </a:xfrm>
+          <a:prstGeom prst="rect">
+            <a:avLst/>
+          </a:prstGeom>
+          <a:noFill/>
+        </p:spPr>
+        <p:txBody>
+          <a:bodyPr wrap="square" lIns="0" rIns="0" tIns="0" bIns="0">
+            <a:normAutofit/>
+          </a:bodyPr>
+          <a:lstStyle/>
+          <a:p>
+            <a:pPr algn="ctr"/>
+            <a:r>
+              <a:rPr sz="1800" b="0" i="0">
+                <a:solidFill>
+                  <a:srgbClr val="5E6B7A"/>
+                </a:solidFill>
+                <a:latin typeface="IBM Plex Sans"/>
+              </a:rPr>
+              <a:t>Byte-identical renders</a:t>
             </a:r>
           </a:p>
         </p:txBody>
@@ -6423,13 +7603,13 @@
           <a:lstStyle/>
           <a:p>
             <a:r>
-              <a:rPr sz="2600" b="1" i="0">
+              <a:rPr sz="3000" b="1" i="0">
                 <a:solidFill>
                   <a:srgbClr val="14161A"/>
                 </a:solidFill>
                 <a:latin typeface="IBM Plex Sans"/>
               </a:rPr>
-              <a:t>Count What Matters: 14 Block Types, 6 Formats, 658+ Tests</a:t>
+              <a:t>docloom architecture, end to end</a:t>
             </a:r>
           </a:p>
         </p:txBody>
@@ -6443,7 +7623,7 @@
         <p:spPr>
           <a:xfrm>
             <a:off x="548640" y="1042416"/>
-            <a:ext cx="11094415" cy="25603"/>
+            <a:ext cx="1097280" cy="25603"/>
           </a:xfrm>
           <a:prstGeom prst="rect">
             <a:avLst/>
@@ -6478,50 +7658,30 @@
           </a:p>
         </p:txBody>
       </p:sp>
-      <p:sp>
-        <p:nvSpPr>
-          <p:cNvPr id="4" name="Rounded Rectangle 3"/>
-          <p:cNvSpPr/>
-          <p:nvPr/>
-        </p:nvSpPr>
-        <p:spPr>
-          <a:xfrm>
-            <a:off x="548640" y="2865363"/>
-            <a:ext cx="2036003" cy="1280160"/>
-          </a:xfrm>
-          <a:prstGeom prst="roundRect">
-            <a:avLst/>
-          </a:prstGeom>
-          <a:solidFill>
-            <a:srgbClr val="EBEEF3"/>
-          </a:solidFill>
-          <a:ln>
-            <a:noFill/>
-          </a:ln>
-          <a:effectLst/>
-        </p:spPr>
-        <p:style>
-          <a:lnRef idx="1">
-            <a:schemeClr val="accent1"/>
-          </a:lnRef>
-          <a:fillRef idx="3">
-            <a:schemeClr val="accent1"/>
-          </a:fillRef>
-          <a:effectRef idx="2">
-            <a:schemeClr val="accent1"/>
-          </a:effectRef>
-          <a:fontRef idx="minor">
-            <a:schemeClr val="lt1"/>
-          </a:fontRef>
-        </p:style>
-        <p:txBody>
-          <a:bodyPr rtlCol="0" anchor="ctr"/>
-          <a:lstStyle/>
-          <a:p>
-            <a:pPr algn="ctr"/>
-          </a:p>
-        </p:txBody>
-      </p:sp>
+      <p:pic>
+        <p:nvPicPr>
+          <p:cNvPr id="4" name="docloom:diagram:anon:9bd9a0f4086a" descr="docloom architecture (full)"/>
+          <p:cNvPicPr>
+            <a:picLocks noChangeAspect="1"/>
+          </p:cNvPicPr>
+          <p:nvPr/>
+        </p:nvPicPr>
+        <p:blipFill>
+          <a:blip r:embed="rId2"/>
+          <a:stretch>
+            <a:fillRect/>
+          </a:stretch>
+        </p:blipFill>
+        <p:spPr>
+          <a:xfrm>
+            <a:off x="548640" y="1205179"/>
+            <a:ext cx="11094415" cy="3536344"/>
+          </a:xfrm>
+          <a:prstGeom prst="rect">
+            <a:avLst/>
+          </a:prstGeom>
+        </p:spPr>
+      </p:pic>
       <p:sp>
         <p:nvSpPr>
           <p:cNvPr id="5" name="TextBox 4"/>
@@ -6530,8 +7690,43 @@
         </p:nvSpPr>
         <p:spPr>
           <a:xfrm>
-            <a:off x="713232" y="3029955"/>
-            <a:ext cx="1706819" cy="384048"/>
+            <a:off x="548640" y="4778099"/>
+            <a:ext cx="11094415" cy="201168"/>
+          </a:xfrm>
+          <a:prstGeom prst="rect">
+            <a:avLst/>
+          </a:prstGeom>
+          <a:noFill/>
+        </p:spPr>
+        <p:txBody>
+          <a:bodyPr wrap="square">
+            <a:spAutoFit/>
+          </a:bodyPr>
+          <a:lstStyle/>
+          <a:p>
+            <a:pPr algn="ctr"/>
+            <a:r>
+              <a:rPr sz="1100" i="1">
+                <a:solidFill>
+                  <a:srgbClr val="5E6B7A"/>
+                </a:solidFill>
+                <a:latin typeface="IBM Plex Sans"/>
+              </a:rPr>
+              <a:t>The full studio + engine architecture: auth, retrieval, jobs, generation, versioned artifacts, and deterministic rendering.</a:t>
+            </a:r>
+          </a:p>
+        </p:txBody>
+      </p:sp>
+      <p:sp>
+        <p:nvSpPr>
+          <p:cNvPr id="6" name="TextBox 5"/>
+          <p:cNvSpPr txBox="1"/>
+          <p:nvPr/>
+        </p:nvSpPr>
+        <p:spPr>
+          <a:xfrm>
+            <a:off x="548640" y="5125571"/>
+            <a:ext cx="11094415" cy="922020"/>
           </a:xfrm>
           <a:prstGeom prst="rect">
             <a:avLst/>
@@ -6544,496 +7739,78 @@
           </a:bodyPr>
           <a:lstStyle/>
           <a:p>
-            <a:r>
-              <a:rPr sz="2400" b="1" i="0">
+            <a:pPr marL="320040" indent="-228600">
+              <a:spcAft>
+                <a:spcPts val="600"/>
+              </a:spcAft>
+            </a:pPr>
+            <a:r>
+              <a:rPr sz="1400">
                 <a:solidFill>
                   <a:srgbClr val="1F3D63"/>
                 </a:solidFill>
                 <a:latin typeface="IBM Plex Sans"/>
               </a:rPr>
-              <a:t>14</a:t>
-            </a:r>
-          </a:p>
-        </p:txBody>
-      </p:sp>
-      <p:sp>
-        <p:nvSpPr>
-          <p:cNvPr id="6" name="TextBox 5"/>
-          <p:cNvSpPr txBox="1"/>
-          <p:nvPr/>
-        </p:nvSpPr>
-        <p:spPr>
-          <a:xfrm>
-            <a:off x="713232" y="3487155"/>
-            <a:ext cx="1706819" cy="237744"/>
-          </a:xfrm>
-          <a:prstGeom prst="rect">
-            <a:avLst/>
-          </a:prstGeom>
-          <a:noFill/>
-        </p:spPr>
-        <p:txBody>
-          <a:bodyPr wrap="square" lIns="0" rIns="0" tIns="0" bIns="0">
-            <a:normAutofit/>
-          </a:bodyPr>
-          <a:lstStyle/>
-          <a:p>
-            <a:r>
-              <a:rPr sz="1300" b="0" i="0">
-                <a:solidFill>
-                  <a:srgbClr val="5E6B7A"/>
-                </a:solidFill>
-                <a:latin typeface="IBM Plex Sans"/>
-              </a:rPr>
-              <a:t>Block Types</a:t>
-            </a:r>
-          </a:p>
-        </p:txBody>
-      </p:sp>
-      <p:sp>
-        <p:nvSpPr>
-          <p:cNvPr id="7" name="Rounded Rectangle 6"/>
-          <p:cNvSpPr/>
-          <p:nvPr/>
-        </p:nvSpPr>
-        <p:spPr>
-          <a:xfrm>
-            <a:off x="2813243" y="2865363"/>
-            <a:ext cx="2036003" cy="1280160"/>
-          </a:xfrm>
-          <a:prstGeom prst="roundRect">
-            <a:avLst/>
-          </a:prstGeom>
-          <a:solidFill>
-            <a:srgbClr val="EBEEF3"/>
-          </a:solidFill>
-          <a:ln>
-            <a:noFill/>
-          </a:ln>
-          <a:effectLst/>
-        </p:spPr>
-        <p:style>
-          <a:lnRef idx="1">
-            <a:schemeClr val="accent1"/>
-          </a:lnRef>
-          <a:fillRef idx="3">
-            <a:schemeClr val="accent1"/>
-          </a:fillRef>
-          <a:effectRef idx="2">
-            <a:schemeClr val="accent1"/>
-          </a:effectRef>
-          <a:fontRef idx="minor">
-            <a:schemeClr val="lt1"/>
-          </a:fontRef>
-        </p:style>
-        <p:txBody>
-          <a:bodyPr rtlCol="0" anchor="ctr"/>
-          <a:lstStyle/>
-          <a:p>
-            <a:pPr algn="ctr"/>
-          </a:p>
-        </p:txBody>
-      </p:sp>
-      <p:sp>
-        <p:nvSpPr>
-          <p:cNvPr id="8" name="TextBox 7"/>
-          <p:cNvSpPr txBox="1"/>
-          <p:nvPr/>
-        </p:nvSpPr>
-        <p:spPr>
-          <a:xfrm>
-            <a:off x="2977835" y="3029955"/>
-            <a:ext cx="1706819" cy="384048"/>
-          </a:xfrm>
-          <a:prstGeom prst="rect">
-            <a:avLst/>
-          </a:prstGeom>
-          <a:noFill/>
-        </p:spPr>
-        <p:txBody>
-          <a:bodyPr wrap="square" lIns="0" rIns="0" tIns="0" bIns="0">
-            <a:normAutofit/>
-          </a:bodyPr>
-          <a:lstStyle/>
-          <a:p>
-            <a:r>
-              <a:rPr sz="2400" b="1" i="0">
+              <a:t>•  </a:t>
+            </a:r>
+            <a:r>
+              <a:rPr sz="1400" b="0" i="0">
+                <a:solidFill>
+                  <a:srgbClr val="14161A"/>
+                </a:solidFill>
+                <a:latin typeface="IBM Plex Sans"/>
+              </a:rPr>
+              <a:t>Sources are chunked, embedded, and ranked, so only the most relevant evidence reaches the model</a:t>
+            </a:r>
+          </a:p>
+          <a:p>
+            <a:pPr marL="320040" indent="-228600">
+              <a:spcAft>
+                <a:spcPts val="600"/>
+              </a:spcAft>
+            </a:pPr>
+            <a:r>
+              <a:rPr sz="1400">
                 <a:solidFill>
                   <a:srgbClr val="1F3D63"/>
                 </a:solidFill>
                 <a:latin typeface="IBM Plex Sans"/>
               </a:rPr>
-              <a:t>6</a:t>
-            </a:r>
-          </a:p>
-        </p:txBody>
-      </p:sp>
-      <p:sp>
-        <p:nvSpPr>
-          <p:cNvPr id="9" name="TextBox 8"/>
-          <p:cNvSpPr txBox="1"/>
-          <p:nvPr/>
-        </p:nvSpPr>
-        <p:spPr>
-          <a:xfrm>
-            <a:off x="2977835" y="3487155"/>
-            <a:ext cx="1706819" cy="237744"/>
-          </a:xfrm>
-          <a:prstGeom prst="rect">
-            <a:avLst/>
-          </a:prstGeom>
-          <a:noFill/>
-        </p:spPr>
-        <p:txBody>
-          <a:bodyPr wrap="square" lIns="0" rIns="0" tIns="0" bIns="0">
-            <a:normAutofit/>
-          </a:bodyPr>
-          <a:lstStyle/>
-          <a:p>
-            <a:r>
-              <a:rPr sz="1300" b="0" i="0">
-                <a:solidFill>
-                  <a:srgbClr val="5E6B7A"/>
-                </a:solidFill>
-                <a:latin typeface="IBM Plex Sans"/>
-              </a:rPr>
-              <a:t>Output Formats</a:t>
-            </a:r>
-          </a:p>
-        </p:txBody>
-      </p:sp>
-      <p:sp>
-        <p:nvSpPr>
-          <p:cNvPr id="10" name="Rounded Rectangle 9"/>
-          <p:cNvSpPr/>
-          <p:nvPr/>
-        </p:nvSpPr>
-        <p:spPr>
-          <a:xfrm>
-            <a:off x="5077846" y="2865363"/>
-            <a:ext cx="2036003" cy="1280160"/>
-          </a:xfrm>
-          <a:prstGeom prst="roundRect">
-            <a:avLst/>
-          </a:prstGeom>
-          <a:solidFill>
-            <a:srgbClr val="EBEEF3"/>
-          </a:solidFill>
-          <a:ln>
-            <a:noFill/>
-          </a:ln>
-          <a:effectLst/>
-        </p:spPr>
-        <p:style>
-          <a:lnRef idx="1">
-            <a:schemeClr val="accent1"/>
-          </a:lnRef>
-          <a:fillRef idx="3">
-            <a:schemeClr val="accent1"/>
-          </a:fillRef>
-          <a:effectRef idx="2">
-            <a:schemeClr val="accent1"/>
-          </a:effectRef>
-          <a:fontRef idx="minor">
-            <a:schemeClr val="lt1"/>
-          </a:fontRef>
-        </p:style>
-        <p:txBody>
-          <a:bodyPr rtlCol="0" anchor="ctr"/>
-          <a:lstStyle/>
-          <a:p>
-            <a:pPr algn="ctr"/>
-          </a:p>
-        </p:txBody>
-      </p:sp>
-      <p:sp>
-        <p:nvSpPr>
-          <p:cNvPr id="11" name="TextBox 10"/>
-          <p:cNvSpPr txBox="1"/>
-          <p:nvPr/>
-        </p:nvSpPr>
-        <p:spPr>
-          <a:xfrm>
-            <a:off x="5242438" y="3029955"/>
-            <a:ext cx="1706819" cy="384048"/>
-          </a:xfrm>
-          <a:prstGeom prst="rect">
-            <a:avLst/>
-          </a:prstGeom>
-          <a:noFill/>
-        </p:spPr>
-        <p:txBody>
-          <a:bodyPr wrap="square" lIns="0" rIns="0" tIns="0" bIns="0">
-            <a:normAutofit/>
-          </a:bodyPr>
-          <a:lstStyle/>
-          <a:p>
-            <a:r>
-              <a:rPr sz="2400" b="1" i="0">
+              <a:t>•  </a:t>
+            </a:r>
+            <a:r>
+              <a:rPr sz="1400" b="0" i="0">
+                <a:solidFill>
+                  <a:srgbClr val="14161A"/>
+                </a:solidFill>
+                <a:latin typeface="IBM Plex Sans"/>
+              </a:rPr>
+              <a:t>The model emits validated IR, never files; the linter checks layout and citations before any render</a:t>
+            </a:r>
+          </a:p>
+          <a:p>
+            <a:pPr marL="320040" indent="-228600">
+              <a:spcAft>
+                <a:spcPts val="600"/>
+              </a:spcAft>
+            </a:pPr>
+            <a:r>
+              <a:rPr sz="1400">
                 <a:solidFill>
                   <a:srgbClr val="1F3D63"/>
                 </a:solidFill>
                 <a:latin typeface="IBM Plex Sans"/>
               </a:rPr>
-              <a:t>8</a:t>
-            </a:r>
-          </a:p>
-        </p:txBody>
-      </p:sp>
-      <p:sp>
-        <p:nvSpPr>
-          <p:cNvPr id="12" name="TextBox 11"/>
-          <p:cNvSpPr txBox="1"/>
-          <p:nvPr/>
-        </p:nvSpPr>
-        <p:spPr>
-          <a:xfrm>
-            <a:off x="5242438" y="3487155"/>
-            <a:ext cx="1706819" cy="237744"/>
-          </a:xfrm>
-          <a:prstGeom prst="rect">
-            <a:avLst/>
-          </a:prstGeom>
-          <a:noFill/>
-        </p:spPr>
-        <p:txBody>
-          <a:bodyPr wrap="square" lIns="0" rIns="0" tIns="0" bIns="0">
-            <a:normAutofit/>
-          </a:bodyPr>
-          <a:lstStyle/>
-          <a:p>
-            <a:r>
-              <a:rPr sz="1300" b="0" i="0">
-                <a:solidFill>
-                  <a:srgbClr val="5E6B7A"/>
-                </a:solidFill>
-                <a:latin typeface="IBM Plex Sans"/>
-              </a:rPr>
-              <a:t>Slide Layouts</a:t>
-            </a:r>
-          </a:p>
-        </p:txBody>
-      </p:sp>
-      <p:sp>
-        <p:nvSpPr>
-          <p:cNvPr id="13" name="Rounded Rectangle 12"/>
-          <p:cNvSpPr/>
-          <p:nvPr/>
-        </p:nvSpPr>
-        <p:spPr>
-          <a:xfrm>
-            <a:off x="7342449" y="2865363"/>
-            <a:ext cx="2036003" cy="1280160"/>
-          </a:xfrm>
-          <a:prstGeom prst="roundRect">
-            <a:avLst/>
-          </a:prstGeom>
-          <a:solidFill>
-            <a:srgbClr val="EBEEF3"/>
-          </a:solidFill>
-          <a:ln>
-            <a:noFill/>
-          </a:ln>
-          <a:effectLst/>
-        </p:spPr>
-        <p:style>
-          <a:lnRef idx="1">
-            <a:schemeClr val="accent1"/>
-          </a:lnRef>
-          <a:fillRef idx="3">
-            <a:schemeClr val="accent1"/>
-          </a:fillRef>
-          <a:effectRef idx="2">
-            <a:schemeClr val="accent1"/>
-          </a:effectRef>
-          <a:fontRef idx="minor">
-            <a:schemeClr val="lt1"/>
-          </a:fontRef>
-        </p:style>
-        <p:txBody>
-          <a:bodyPr rtlCol="0" anchor="ctr"/>
-          <a:lstStyle/>
-          <a:p>
-            <a:pPr algn="ctr"/>
-          </a:p>
-        </p:txBody>
-      </p:sp>
-      <p:sp>
-        <p:nvSpPr>
-          <p:cNvPr id="14" name="TextBox 13"/>
-          <p:cNvSpPr txBox="1"/>
-          <p:nvPr/>
-        </p:nvSpPr>
-        <p:spPr>
-          <a:xfrm>
-            <a:off x="7507041" y="3029955"/>
-            <a:ext cx="1706819" cy="384048"/>
-          </a:xfrm>
-          <a:prstGeom prst="rect">
-            <a:avLst/>
-          </a:prstGeom>
-          <a:noFill/>
-        </p:spPr>
-        <p:txBody>
-          <a:bodyPr wrap="square" lIns="0" rIns="0" tIns="0" bIns="0">
-            <a:normAutofit/>
-          </a:bodyPr>
-          <a:lstStyle/>
-          <a:p>
-            <a:r>
-              <a:rPr sz="2400" b="1" i="0">
-                <a:solidFill>
-                  <a:srgbClr val="1F3D63"/>
-                </a:solidFill>
-                <a:latin typeface="IBM Plex Sans"/>
-              </a:rPr>
-              <a:t>7</a:t>
-            </a:r>
-          </a:p>
-        </p:txBody>
-      </p:sp>
-      <p:sp>
-        <p:nvSpPr>
-          <p:cNvPr id="15" name="TextBox 14"/>
-          <p:cNvSpPr txBox="1"/>
-          <p:nvPr/>
-        </p:nvSpPr>
-        <p:spPr>
-          <a:xfrm>
-            <a:off x="7507041" y="3487155"/>
-            <a:ext cx="1706819" cy="237744"/>
-          </a:xfrm>
-          <a:prstGeom prst="rect">
-            <a:avLst/>
-          </a:prstGeom>
-          <a:noFill/>
-        </p:spPr>
-        <p:txBody>
-          <a:bodyPr wrap="square" lIns="0" rIns="0" tIns="0" bIns="0">
-            <a:normAutofit/>
-          </a:bodyPr>
-          <a:lstStyle/>
-          <a:p>
-            <a:r>
-              <a:rPr sz="1300" b="0" i="0">
-                <a:solidFill>
-                  <a:srgbClr val="5E6B7A"/>
-                </a:solidFill>
-                <a:latin typeface="IBM Plex Sans"/>
-              </a:rPr>
-              <a:t>Diagram Node Types</a:t>
-            </a:r>
-          </a:p>
-        </p:txBody>
-      </p:sp>
-      <p:sp>
-        <p:nvSpPr>
-          <p:cNvPr id="16" name="Rounded Rectangle 15"/>
-          <p:cNvSpPr/>
-          <p:nvPr/>
-        </p:nvSpPr>
-        <p:spPr>
-          <a:xfrm>
-            <a:off x="9607052" y="2865363"/>
-            <a:ext cx="2036003" cy="1280160"/>
-          </a:xfrm>
-          <a:prstGeom prst="roundRect">
-            <a:avLst/>
-          </a:prstGeom>
-          <a:solidFill>
-            <a:srgbClr val="EBEEF3"/>
-          </a:solidFill>
-          <a:ln>
-            <a:noFill/>
-          </a:ln>
-          <a:effectLst/>
-        </p:spPr>
-        <p:style>
-          <a:lnRef idx="1">
-            <a:schemeClr val="accent1"/>
-          </a:lnRef>
-          <a:fillRef idx="3">
-            <a:schemeClr val="accent1"/>
-          </a:fillRef>
-          <a:effectRef idx="2">
-            <a:schemeClr val="accent1"/>
-          </a:effectRef>
-          <a:fontRef idx="minor">
-            <a:schemeClr val="lt1"/>
-          </a:fontRef>
-        </p:style>
-        <p:txBody>
-          <a:bodyPr rtlCol="0" anchor="ctr"/>
-          <a:lstStyle/>
-          <a:p>
-            <a:pPr algn="ctr"/>
-          </a:p>
-        </p:txBody>
-      </p:sp>
-      <p:sp>
-        <p:nvSpPr>
-          <p:cNvPr id="17" name="TextBox 16"/>
-          <p:cNvSpPr txBox="1"/>
-          <p:nvPr/>
-        </p:nvSpPr>
-        <p:spPr>
-          <a:xfrm>
-            <a:off x="9771644" y="3029955"/>
-            <a:ext cx="1706819" cy="384048"/>
-          </a:xfrm>
-          <a:prstGeom prst="rect">
-            <a:avLst/>
-          </a:prstGeom>
-          <a:noFill/>
-        </p:spPr>
-        <p:txBody>
-          <a:bodyPr wrap="square" lIns="0" rIns="0" tIns="0" bIns="0">
-            <a:normAutofit/>
-          </a:bodyPr>
-          <a:lstStyle/>
-          <a:p>
-            <a:r>
-              <a:rPr sz="2400" b="1" i="0">
-                <a:solidFill>
-                  <a:srgbClr val="1F3D63"/>
-                </a:solidFill>
-                <a:latin typeface="IBM Plex Sans"/>
-              </a:rPr>
-              <a:t>658+</a:t>
-            </a:r>
-          </a:p>
-        </p:txBody>
-      </p:sp>
-      <p:sp>
-        <p:nvSpPr>
-          <p:cNvPr id="18" name="TextBox 17"/>
-          <p:cNvSpPr txBox="1"/>
-          <p:nvPr/>
-        </p:nvSpPr>
-        <p:spPr>
-          <a:xfrm>
-            <a:off x="9771644" y="3487155"/>
-            <a:ext cx="1706819" cy="237744"/>
-          </a:xfrm>
-          <a:prstGeom prst="rect">
-            <a:avLst/>
-          </a:prstGeom>
-          <a:noFill/>
-        </p:spPr>
-        <p:txBody>
-          <a:bodyPr wrap="square" lIns="0" rIns="0" tIns="0" bIns="0">
-            <a:normAutofit/>
-          </a:bodyPr>
-          <a:lstStyle/>
-          <a:p>
-            <a:r>
-              <a:rPr sz="1300" b="0" i="0">
-                <a:solidFill>
-                  <a:srgbClr val="5E6B7A"/>
-                </a:solidFill>
-                <a:latin typeface="IBM Plex Sans"/>
-              </a:rPr>
-              <a:t>Tests (Passing)</a:t>
+              <a:t>•  </a:t>
+            </a:r>
+            <a:r>
+              <a:rPr sz="1400" b="0" i="0">
+                <a:solidFill>
+                  <a:srgbClr val="14161A"/>
+                </a:solidFill>
+                <a:latin typeface="IBM Plex Sans"/>
+              </a:rPr>
+              <a:t>Deterministic renderers turn one IR into all six formats with no lossy conversion</a:t>
             </a:r>
           </a:p>
         </p:txBody>
@@ -7087,13 +7864,13 @@
           <a:lstStyle/>
           <a:p>
             <a:r>
-              <a:rPr sz="2600" b="1" i="0">
+              <a:rPr sz="3000" b="1" i="0">
                 <a:solidFill>
                   <a:srgbClr val="14161A"/>
                 </a:solidFill>
                 <a:latin typeface="IBM Plex Sans"/>
               </a:rPr>
-              <a:t>Generate Six Native Formats from One IR</a:t>
+              <a:t>Follow sources from ingest to shipped files</a:t>
             </a:r>
           </a:p>
         </p:txBody>
@@ -7107,7 +7884,7 @@
         <p:spPr>
           <a:xfrm>
             <a:off x="548640" y="1042416"/>
-            <a:ext cx="11094415" cy="25603"/>
+            <a:ext cx="1097280" cy="25603"/>
           </a:xfrm>
           <a:prstGeom prst="rect">
             <a:avLst/>
@@ -7144,14 +7921,102 @@
       </p:sp>
       <p:sp>
         <p:nvSpPr>
-          <p:cNvPr id="4" name="TextBox 3"/>
+          <p:cNvPr id="4" name="Rectangle 3"/>
+          <p:cNvSpPr/>
+          <p:nvPr/>
+        </p:nvSpPr>
+        <p:spPr>
+          <a:xfrm>
+            <a:off x="1658081" y="3501237"/>
+            <a:ext cx="8875532" cy="18288"/>
+          </a:xfrm>
+          <a:prstGeom prst="rect">
+            <a:avLst/>
+          </a:prstGeom>
+          <a:solidFill>
+            <a:srgbClr val="6D819A"/>
+          </a:solidFill>
+          <a:ln>
+            <a:noFill/>
+          </a:ln>
+          <a:effectLst/>
+        </p:spPr>
+        <p:style>
+          <a:lnRef idx="1">
+            <a:schemeClr val="accent1"/>
+          </a:lnRef>
+          <a:fillRef idx="3">
+            <a:schemeClr val="accent1"/>
+          </a:fillRef>
+          <a:effectRef idx="2">
+            <a:schemeClr val="accent1"/>
+          </a:effectRef>
+          <a:fontRef idx="minor">
+            <a:schemeClr val="lt1"/>
+          </a:fontRef>
+        </p:style>
+        <p:txBody>
+          <a:bodyPr rtlCol="0" anchor="ctr"/>
+          <a:lstStyle/>
+          <a:p>
+            <a:pPr algn="ctr"/>
+          </a:p>
+        </p:txBody>
+      </p:sp>
+      <p:sp>
+        <p:nvSpPr>
+          <p:cNvPr id="5" name="Oval 4"/>
+          <p:cNvSpPr/>
+          <p:nvPr/>
+        </p:nvSpPr>
+        <p:spPr>
+          <a:xfrm>
+            <a:off x="1539209" y="3391509"/>
+            <a:ext cx="237744" cy="237744"/>
+          </a:xfrm>
+          <a:prstGeom prst="ellipse">
+            <a:avLst/>
+          </a:prstGeom>
+          <a:solidFill>
+            <a:srgbClr val="2F62A0"/>
+          </a:solidFill>
+          <a:ln>
+            <a:noFill/>
+          </a:ln>
+          <a:effectLst/>
+        </p:spPr>
+        <p:style>
+          <a:lnRef idx="1">
+            <a:schemeClr val="accent1"/>
+          </a:lnRef>
+          <a:fillRef idx="3">
+            <a:schemeClr val="accent1"/>
+          </a:fillRef>
+          <a:effectRef idx="2">
+            <a:schemeClr val="accent1"/>
+          </a:effectRef>
+          <a:fontRef idx="minor">
+            <a:schemeClr val="lt1"/>
+          </a:fontRef>
+        </p:style>
+        <p:txBody>
+          <a:bodyPr rtlCol="0" anchor="ctr"/>
+          <a:lstStyle/>
+          <a:p>
+            <a:pPr algn="ctr"/>
+          </a:p>
+        </p:txBody>
+      </p:sp>
+      <p:sp>
+        <p:nvSpPr>
+          <p:cNvPr id="6" name="TextBox 5"/>
           <p:cNvSpPr txBox="1"/>
           <p:nvPr/>
         </p:nvSpPr>
         <p:spPr>
           <a:xfrm>
-            <a:off x="548640" y="2434910"/>
-            <a:ext cx="11094415" cy="2305049"/>
+            <a:off x="548640" y="3080613"/>
+            <a:ext cx="2218883" cy="274320"/>
           </a:xfrm>
           <a:prstGeom prst="rect">
             <a:avLst/>
@@ -7164,153 +8029,506 @@
           </a:bodyPr>
           <a:lstStyle/>
           <a:p>
-            <a:pPr marL="320040" indent="-228600">
-              <a:spcAft>
-                <a:spcPts val="600"/>
-              </a:spcAft>
-            </a:pPr>
-            <a:r>
-              <a:rPr sz="1750">
-                <a:solidFill>
-                  <a:srgbClr val="1F3D63"/>
-                </a:solidFill>
-                <a:latin typeface="IBM Plex Sans"/>
-              </a:rPr>
-              <a:t>•  </a:t>
-            </a:r>
-            <a:r>
-              <a:rPr sz="1750" b="0" i="0">
+            <a:pPr algn="ctr"/>
+            <a:r>
+              <a:rPr sz="1400" b="1" i="0">
+                <a:solidFill>
+                  <a:srgbClr val="2F62A0"/>
+                </a:solidFill>
+                <a:latin typeface="IBM Plex Sans"/>
+              </a:rPr>
+              <a:t>01</a:t>
+            </a:r>
+          </a:p>
+        </p:txBody>
+      </p:sp>
+      <p:sp>
+        <p:nvSpPr>
+          <p:cNvPr id="7" name="TextBox 6"/>
+          <p:cNvSpPr txBox="1"/>
+          <p:nvPr/>
+        </p:nvSpPr>
+        <p:spPr>
+          <a:xfrm>
+            <a:off x="603503" y="3738981"/>
+            <a:ext cx="2109155" cy="932687"/>
+          </a:xfrm>
+          <a:prstGeom prst="rect">
+            <a:avLst/>
+          </a:prstGeom>
+          <a:noFill/>
+        </p:spPr>
+        <p:txBody>
+          <a:bodyPr wrap="square" lIns="0" rIns="0" tIns="0" bIns="0">
+            <a:normAutofit/>
+          </a:bodyPr>
+          <a:lstStyle/>
+          <a:p>
+            <a:pPr algn="ctr"/>
+            <a:r>
+              <a:rPr sz="1260" b="0" i="0">
                 <a:solidFill>
                   <a:srgbClr val="14161A"/>
                 </a:solidFill>
                 <a:latin typeface="IBM Plex Sans"/>
               </a:rPr>
-              <a:t>PPTX: native editable charts, autofit text, native shapes</a:t>
-            </a:r>
-          </a:p>
-          <a:p>
-            <a:pPr marL="320040" indent="-228600">
-              <a:spcAft>
-                <a:spcPts val="600"/>
-              </a:spcAft>
-            </a:pPr>
-            <a:r>
-              <a:rPr sz="1750">
-                <a:solidFill>
-                  <a:srgbClr val="1F3D63"/>
-                </a:solidFill>
-                <a:latin typeface="IBM Plex Sans"/>
-              </a:rPr>
-              <a:t>•  </a:t>
-            </a:r>
-            <a:r>
-              <a:rPr sz="1750" b="0" i="0">
+              <a:t>Ingest sources</a:t>
+            </a:r>
+          </a:p>
+        </p:txBody>
+      </p:sp>
+      <p:sp>
+        <p:nvSpPr>
+          <p:cNvPr id="8" name="Oval 7"/>
+          <p:cNvSpPr/>
+          <p:nvPr/>
+        </p:nvSpPr>
+        <p:spPr>
+          <a:xfrm>
+            <a:off x="3758092" y="3391509"/>
+            <a:ext cx="237744" cy="237744"/>
+          </a:xfrm>
+          <a:prstGeom prst="ellipse">
+            <a:avLst/>
+          </a:prstGeom>
+          <a:solidFill>
+            <a:srgbClr val="2F62A0"/>
+          </a:solidFill>
+          <a:ln>
+            <a:noFill/>
+          </a:ln>
+          <a:effectLst/>
+        </p:spPr>
+        <p:style>
+          <a:lnRef idx="1">
+            <a:schemeClr val="accent1"/>
+          </a:lnRef>
+          <a:fillRef idx="3">
+            <a:schemeClr val="accent1"/>
+          </a:fillRef>
+          <a:effectRef idx="2">
+            <a:schemeClr val="accent1"/>
+          </a:effectRef>
+          <a:fontRef idx="minor">
+            <a:schemeClr val="lt1"/>
+          </a:fontRef>
+        </p:style>
+        <p:txBody>
+          <a:bodyPr rtlCol="0" anchor="ctr"/>
+          <a:lstStyle/>
+          <a:p>
+            <a:pPr algn="ctr"/>
+          </a:p>
+        </p:txBody>
+      </p:sp>
+      <p:sp>
+        <p:nvSpPr>
+          <p:cNvPr id="9" name="TextBox 8"/>
+          <p:cNvSpPr txBox="1"/>
+          <p:nvPr/>
+        </p:nvSpPr>
+        <p:spPr>
+          <a:xfrm>
+            <a:off x="2767523" y="3080613"/>
+            <a:ext cx="2218883" cy="274320"/>
+          </a:xfrm>
+          <a:prstGeom prst="rect">
+            <a:avLst/>
+          </a:prstGeom>
+          <a:noFill/>
+        </p:spPr>
+        <p:txBody>
+          <a:bodyPr wrap="square" lIns="0" rIns="0" tIns="0" bIns="0">
+            <a:normAutofit/>
+          </a:bodyPr>
+          <a:lstStyle/>
+          <a:p>
+            <a:pPr algn="ctr"/>
+            <a:r>
+              <a:rPr sz="1400" b="1" i="0">
+                <a:solidFill>
+                  <a:srgbClr val="2F62A0"/>
+                </a:solidFill>
+                <a:latin typeface="IBM Plex Sans"/>
+              </a:rPr>
+              <a:t>02</a:t>
+            </a:r>
+          </a:p>
+        </p:txBody>
+      </p:sp>
+      <p:sp>
+        <p:nvSpPr>
+          <p:cNvPr id="10" name="TextBox 9"/>
+          <p:cNvSpPr txBox="1"/>
+          <p:nvPr/>
+        </p:nvSpPr>
+        <p:spPr>
+          <a:xfrm>
+            <a:off x="2822387" y="3738981"/>
+            <a:ext cx="2109155" cy="932687"/>
+          </a:xfrm>
+          <a:prstGeom prst="rect">
+            <a:avLst/>
+          </a:prstGeom>
+          <a:noFill/>
+        </p:spPr>
+        <p:txBody>
+          <a:bodyPr wrap="square" lIns="0" rIns="0" tIns="0" bIns="0">
+            <a:normAutofit/>
+          </a:bodyPr>
+          <a:lstStyle/>
+          <a:p>
+            <a:pPr algn="ctr"/>
+            <a:r>
+              <a:rPr sz="1260" b="0" i="0">
                 <a:solidFill>
                   <a:srgbClr val="14161A"/>
                 </a:solidFill>
                 <a:latin typeface="IBM Plex Sans"/>
               </a:rPr>
-              <a:t>DOCX: hardened tables, repeating headers, fixed column widths</a:t>
-            </a:r>
-          </a:p>
-          <a:p>
-            <a:pPr marL="320040" indent="-228600">
-              <a:spcAft>
-                <a:spcPts val="600"/>
-              </a:spcAft>
-            </a:pPr>
-            <a:r>
-              <a:rPr sz="1750">
-                <a:solidFill>
-                  <a:srgbClr val="1F3D63"/>
-                </a:solidFill>
-                <a:latin typeface="IBM Plex Sans"/>
-              </a:rPr>
-              <a:t>•  </a:t>
-            </a:r>
-            <a:r>
-              <a:rPr sz="1750" b="0" i="0">
+              <a:t>Retrieve evidence</a:t>
+            </a:r>
+          </a:p>
+        </p:txBody>
+      </p:sp>
+      <p:sp>
+        <p:nvSpPr>
+          <p:cNvPr id="11" name="Oval 10"/>
+          <p:cNvSpPr/>
+          <p:nvPr/>
+        </p:nvSpPr>
+        <p:spPr>
+          <a:xfrm>
+            <a:off x="5976975" y="3391509"/>
+            <a:ext cx="237744" cy="237744"/>
+          </a:xfrm>
+          <a:prstGeom prst="ellipse">
+            <a:avLst/>
+          </a:prstGeom>
+          <a:solidFill>
+            <a:srgbClr val="2F62A0"/>
+          </a:solidFill>
+          <a:ln>
+            <a:noFill/>
+          </a:ln>
+          <a:effectLst/>
+        </p:spPr>
+        <p:style>
+          <a:lnRef idx="1">
+            <a:schemeClr val="accent1"/>
+          </a:lnRef>
+          <a:fillRef idx="3">
+            <a:schemeClr val="accent1"/>
+          </a:fillRef>
+          <a:effectRef idx="2">
+            <a:schemeClr val="accent1"/>
+          </a:effectRef>
+          <a:fontRef idx="minor">
+            <a:schemeClr val="lt1"/>
+          </a:fontRef>
+        </p:style>
+        <p:txBody>
+          <a:bodyPr rtlCol="0" anchor="ctr"/>
+          <a:lstStyle/>
+          <a:p>
+            <a:pPr algn="ctr"/>
+          </a:p>
+        </p:txBody>
+      </p:sp>
+      <p:sp>
+        <p:nvSpPr>
+          <p:cNvPr id="12" name="TextBox 11"/>
+          <p:cNvSpPr txBox="1"/>
+          <p:nvPr/>
+        </p:nvSpPr>
+        <p:spPr>
+          <a:xfrm>
+            <a:off x="4986406" y="3080613"/>
+            <a:ext cx="2218883" cy="274320"/>
+          </a:xfrm>
+          <a:prstGeom prst="rect">
+            <a:avLst/>
+          </a:prstGeom>
+          <a:noFill/>
+        </p:spPr>
+        <p:txBody>
+          <a:bodyPr wrap="square" lIns="0" rIns="0" tIns="0" bIns="0">
+            <a:normAutofit/>
+          </a:bodyPr>
+          <a:lstStyle/>
+          <a:p>
+            <a:pPr algn="ctr"/>
+            <a:r>
+              <a:rPr sz="1400" b="1" i="0">
+                <a:solidFill>
+                  <a:srgbClr val="2F62A0"/>
+                </a:solidFill>
+                <a:latin typeface="IBM Plex Sans"/>
+              </a:rPr>
+              <a:t>03</a:t>
+            </a:r>
+          </a:p>
+        </p:txBody>
+      </p:sp>
+      <p:sp>
+        <p:nvSpPr>
+          <p:cNvPr id="13" name="TextBox 12"/>
+          <p:cNvSpPr txBox="1"/>
+          <p:nvPr/>
+        </p:nvSpPr>
+        <p:spPr>
+          <a:xfrm>
+            <a:off x="5041270" y="3738981"/>
+            <a:ext cx="2109155" cy="932687"/>
+          </a:xfrm>
+          <a:prstGeom prst="rect">
+            <a:avLst/>
+          </a:prstGeom>
+          <a:noFill/>
+        </p:spPr>
+        <p:txBody>
+          <a:bodyPr wrap="square" lIns="0" rIns="0" tIns="0" bIns="0">
+            <a:normAutofit/>
+          </a:bodyPr>
+          <a:lstStyle/>
+          <a:p>
+            <a:pPr algn="ctr"/>
+            <a:r>
+              <a:rPr sz="1260" b="0" i="0">
                 <a:solidFill>
                   <a:srgbClr val="14161A"/>
                 </a:solidFill>
                 <a:latin typeface="IBM Plex Sans"/>
               </a:rPr>
-              <a:t>XLSX: typed cells, formulas, number formats</a:t>
-            </a:r>
-          </a:p>
-          <a:p>
-            <a:pPr marL="320040" indent="-228600">
-              <a:spcAft>
-                <a:spcPts val="600"/>
-              </a:spcAft>
-            </a:pPr>
-            <a:r>
-              <a:rPr sz="1750">
-                <a:solidFill>
-                  <a:srgbClr val="1F3D63"/>
-                </a:solidFill>
-                <a:latin typeface="IBM Plex Sans"/>
-              </a:rPr>
-              <a:t>•  </a:t>
-            </a:r>
-            <a:r>
-              <a:rPr sz="1750" b="0" i="0">
+              <a:t>Generate IR</a:t>
+            </a:r>
+          </a:p>
+        </p:txBody>
+      </p:sp>
+      <p:sp>
+        <p:nvSpPr>
+          <p:cNvPr id="14" name="Oval 13"/>
+          <p:cNvSpPr/>
+          <p:nvPr/>
+        </p:nvSpPr>
+        <p:spPr>
+          <a:xfrm>
+            <a:off x="8195858" y="3391509"/>
+            <a:ext cx="237744" cy="237744"/>
+          </a:xfrm>
+          <a:prstGeom prst="ellipse">
+            <a:avLst/>
+          </a:prstGeom>
+          <a:solidFill>
+            <a:srgbClr val="2F62A0"/>
+          </a:solidFill>
+          <a:ln>
+            <a:noFill/>
+          </a:ln>
+          <a:effectLst/>
+        </p:spPr>
+        <p:style>
+          <a:lnRef idx="1">
+            <a:schemeClr val="accent1"/>
+          </a:lnRef>
+          <a:fillRef idx="3">
+            <a:schemeClr val="accent1"/>
+          </a:fillRef>
+          <a:effectRef idx="2">
+            <a:schemeClr val="accent1"/>
+          </a:effectRef>
+          <a:fontRef idx="minor">
+            <a:schemeClr val="lt1"/>
+          </a:fontRef>
+        </p:style>
+        <p:txBody>
+          <a:bodyPr rtlCol="0" anchor="ctr"/>
+          <a:lstStyle/>
+          <a:p>
+            <a:pPr algn="ctr"/>
+          </a:p>
+        </p:txBody>
+      </p:sp>
+      <p:sp>
+        <p:nvSpPr>
+          <p:cNvPr id="15" name="TextBox 14"/>
+          <p:cNvSpPr txBox="1"/>
+          <p:nvPr/>
+        </p:nvSpPr>
+        <p:spPr>
+          <a:xfrm>
+            <a:off x="7205289" y="3080613"/>
+            <a:ext cx="2218883" cy="274320"/>
+          </a:xfrm>
+          <a:prstGeom prst="rect">
+            <a:avLst/>
+          </a:prstGeom>
+          <a:noFill/>
+        </p:spPr>
+        <p:txBody>
+          <a:bodyPr wrap="square" lIns="0" rIns="0" tIns="0" bIns="0">
+            <a:normAutofit/>
+          </a:bodyPr>
+          <a:lstStyle/>
+          <a:p>
+            <a:pPr algn="ctr"/>
+            <a:r>
+              <a:rPr sz="1400" b="1" i="0">
+                <a:solidFill>
+                  <a:srgbClr val="2F62A0"/>
+                </a:solidFill>
+                <a:latin typeface="IBM Plex Sans"/>
+              </a:rPr>
+              <a:t>04</a:t>
+            </a:r>
+          </a:p>
+        </p:txBody>
+      </p:sp>
+      <p:sp>
+        <p:nvSpPr>
+          <p:cNvPr id="16" name="TextBox 15"/>
+          <p:cNvSpPr txBox="1"/>
+          <p:nvPr/>
+        </p:nvSpPr>
+        <p:spPr>
+          <a:xfrm>
+            <a:off x="7260153" y="3738981"/>
+            <a:ext cx="2109155" cy="932687"/>
+          </a:xfrm>
+          <a:prstGeom prst="rect">
+            <a:avLst/>
+          </a:prstGeom>
+          <a:noFill/>
+        </p:spPr>
+        <p:txBody>
+          <a:bodyPr wrap="square" lIns="0" rIns="0" tIns="0" bIns="0">
+            <a:normAutofit/>
+          </a:bodyPr>
+          <a:lstStyle/>
+          <a:p>
+            <a:pPr algn="ctr"/>
+            <a:r>
+              <a:rPr sz="1260" b="0" i="0">
                 <a:solidFill>
                   <a:srgbClr val="14161A"/>
                 </a:solidFill>
                 <a:latin typeface="IBM Plex Sans"/>
               </a:rPr>
-              <a:t>PDF: Typst compiled in-process, no LaTeX needed</a:t>
-            </a:r>
-          </a:p>
-          <a:p>
-            <a:pPr marL="320040" indent="-228600">
-              <a:spcAft>
-                <a:spcPts val="600"/>
-              </a:spcAft>
-            </a:pPr>
-            <a:r>
-              <a:rPr sz="1750">
-                <a:solidFill>
-                  <a:srgbClr val="1F3D63"/>
-                </a:solidFill>
-                <a:latin typeface="IBM Plex Sans"/>
-              </a:rPr>
-              <a:t>•  </a:t>
-            </a:r>
-            <a:r>
-              <a:rPr sz="1750" b="0" i="0">
+              <a:t>Lint findings</a:t>
+            </a:r>
+          </a:p>
+        </p:txBody>
+      </p:sp>
+      <p:sp>
+        <p:nvSpPr>
+          <p:cNvPr id="17" name="Oval 16"/>
+          <p:cNvSpPr/>
+          <p:nvPr/>
+        </p:nvSpPr>
+        <p:spPr>
+          <a:xfrm>
+            <a:off x="10414741" y="3391509"/>
+            <a:ext cx="237744" cy="237744"/>
+          </a:xfrm>
+          <a:prstGeom prst="ellipse">
+            <a:avLst/>
+          </a:prstGeom>
+          <a:solidFill>
+            <a:srgbClr val="2F62A0"/>
+          </a:solidFill>
+          <a:ln>
+            <a:noFill/>
+          </a:ln>
+          <a:effectLst/>
+        </p:spPr>
+        <p:style>
+          <a:lnRef idx="1">
+            <a:schemeClr val="accent1"/>
+          </a:lnRef>
+          <a:fillRef idx="3">
+            <a:schemeClr val="accent1"/>
+          </a:fillRef>
+          <a:effectRef idx="2">
+            <a:schemeClr val="accent1"/>
+          </a:effectRef>
+          <a:fontRef idx="minor">
+            <a:schemeClr val="lt1"/>
+          </a:fontRef>
+        </p:style>
+        <p:txBody>
+          <a:bodyPr rtlCol="0" anchor="ctr"/>
+          <a:lstStyle/>
+          <a:p>
+            <a:pPr algn="ctr"/>
+          </a:p>
+        </p:txBody>
+      </p:sp>
+      <p:sp>
+        <p:nvSpPr>
+          <p:cNvPr id="18" name="TextBox 17"/>
+          <p:cNvSpPr txBox="1"/>
+          <p:nvPr/>
+        </p:nvSpPr>
+        <p:spPr>
+          <a:xfrm>
+            <a:off x="9424172" y="3080613"/>
+            <a:ext cx="2218883" cy="274320"/>
+          </a:xfrm>
+          <a:prstGeom prst="rect">
+            <a:avLst/>
+          </a:prstGeom>
+          <a:noFill/>
+        </p:spPr>
+        <p:txBody>
+          <a:bodyPr wrap="square" lIns="0" rIns="0" tIns="0" bIns="0">
+            <a:normAutofit/>
+          </a:bodyPr>
+          <a:lstStyle/>
+          <a:p>
+            <a:pPr algn="ctr"/>
+            <a:r>
+              <a:rPr sz="1400" b="1" i="0">
+                <a:solidFill>
+                  <a:srgbClr val="2F62A0"/>
+                </a:solidFill>
+                <a:latin typeface="IBM Plex Sans"/>
+              </a:rPr>
+              <a:t>05</a:t>
+            </a:r>
+          </a:p>
+        </p:txBody>
+      </p:sp>
+      <p:sp>
+        <p:nvSpPr>
+          <p:cNvPr id="19" name="TextBox 18"/>
+          <p:cNvSpPr txBox="1"/>
+          <p:nvPr/>
+        </p:nvSpPr>
+        <p:spPr>
+          <a:xfrm>
+            <a:off x="9479036" y="3738981"/>
+            <a:ext cx="2109155" cy="932687"/>
+          </a:xfrm>
+          <a:prstGeom prst="rect">
+            <a:avLst/>
+          </a:prstGeom>
+          <a:noFill/>
+        </p:spPr>
+        <p:txBody>
+          <a:bodyPr wrap="square" lIns="0" rIns="0" tIns="0" bIns="0">
+            <a:normAutofit/>
+          </a:bodyPr>
+          <a:lstStyle/>
+          <a:p>
+            <a:pPr algn="ctr"/>
+            <a:r>
+              <a:rPr sz="1260" b="0" i="0">
                 <a:solidFill>
                   <a:srgbClr val="14161A"/>
                 </a:solidFill>
                 <a:latin typeface="IBM Plex Sans"/>
               </a:rPr>
-              <a:t>HTML: semantic markup with WCAG 2.x contrast</a:t>
-            </a:r>
-          </a:p>
-          <a:p>
-            <a:pPr marL="320040" indent="-228600">
-              <a:spcAft>
-                <a:spcPts val="600"/>
-              </a:spcAft>
-            </a:pPr>
-            <a:r>
-              <a:rPr sz="1750">
-                <a:solidFill>
-                  <a:srgbClr val="1F3D63"/>
-                </a:solidFill>
-                <a:latin typeface="IBM Plex Sans"/>
-              </a:rPr>
-              <a:t>•  </a:t>
-            </a:r>
-            <a:r>
-              <a:rPr sz="1750" b="0" i="0">
-                <a:solidFill>
-                  <a:srgbClr val="14161A"/>
-                </a:solidFill>
-                <a:latin typeface="IBM Plex Sans"/>
-              </a:rPr>
-              <a:t>Markdown: clean, readable prose</a:t>
+              <a:t>Render files</a:t>
             </a:r>
           </a:p>
         </p:txBody>
@@ -7364,13 +8582,13 @@
           <a:lstStyle/>
           <a:p>
             <a:r>
-              <a:rPr sz="2600" b="1" i="0">
+              <a:rPr sz="3000" b="1" i="0">
                 <a:solidFill>
                   <a:srgbClr val="14161A"/>
                 </a:solidFill>
                 <a:latin typeface="IBM Plex Sans"/>
               </a:rPr>
-              <a:t>Turn Source Data into Grounded Artifacts</a:t>
+              <a:t>Count What Matters: 14 Block Types, 6 Formats, 658+ Tests</a:t>
             </a:r>
           </a:p>
         </p:txBody>
@@ -7384,7 +8602,7 @@
         <p:spPr>
           <a:xfrm>
             <a:off x="548640" y="1042416"/>
-            <a:ext cx="11094415" cy="25603"/>
+            <a:ext cx="1097280" cy="25603"/>
           </a:xfrm>
           <a:prstGeom prst="rect">
             <a:avLst/>
@@ -7421,14 +8639,58 @@
       </p:sp>
       <p:sp>
         <p:nvSpPr>
-          <p:cNvPr id="4" name="TextBox 3"/>
+          <p:cNvPr id="4" name="Rounded Rectangle 3"/>
+          <p:cNvSpPr/>
+          <p:nvPr/>
+        </p:nvSpPr>
+        <p:spPr>
+          <a:xfrm>
+            <a:off x="548640" y="3117189"/>
+            <a:ext cx="2036003" cy="1280160"/>
+          </a:xfrm>
+          <a:prstGeom prst="roundRect">
+            <a:avLst/>
+          </a:prstGeom>
+          <a:solidFill>
+            <a:srgbClr val="EBEEF3"/>
+          </a:solidFill>
+          <a:ln>
+            <a:noFill/>
+          </a:ln>
+          <a:effectLst/>
+        </p:spPr>
+        <p:style>
+          <a:lnRef idx="1">
+            <a:schemeClr val="accent1"/>
+          </a:lnRef>
+          <a:fillRef idx="3">
+            <a:schemeClr val="accent1"/>
+          </a:fillRef>
+          <a:effectRef idx="2">
+            <a:schemeClr val="accent1"/>
+          </a:effectRef>
+          <a:fontRef idx="minor">
+            <a:schemeClr val="lt1"/>
+          </a:fontRef>
+        </p:style>
+        <p:txBody>
+          <a:bodyPr rtlCol="0" anchor="ctr"/>
+          <a:lstStyle/>
+          <a:p>
+            <a:pPr algn="ctr"/>
+          </a:p>
+        </p:txBody>
+      </p:sp>
+      <p:sp>
+        <p:nvSpPr>
+          <p:cNvPr id="5" name="TextBox 4"/>
           <p:cNvSpPr txBox="1"/>
           <p:nvPr/>
         </p:nvSpPr>
         <p:spPr>
           <a:xfrm>
-            <a:off x="548640" y="2579541"/>
-            <a:ext cx="5318607" cy="350837"/>
+            <a:off x="713232" y="3281781"/>
+            <a:ext cx="1706819" cy="487680"/>
           </a:xfrm>
           <a:prstGeom prst="rect">
             <a:avLst/>
@@ -7442,27 +8704,27 @@
           <a:lstStyle/>
           <a:p>
             <a:r>
-              <a:rPr sz="2125" b="1" i="0">
-                <a:solidFill>
-                  <a:srgbClr val="14161A"/>
-                </a:solidFill>
-                <a:latin typeface="IBM Plex Sans"/>
-              </a:rPr>
-              <a:t>Add Sources</a:t>
-            </a:r>
-          </a:p>
-        </p:txBody>
-      </p:sp>
-      <p:sp>
-        <p:nvSpPr>
-          <p:cNvPr id="5" name="TextBox 4"/>
+              <a:rPr sz="2400" b="1" i="0">
+                <a:solidFill>
+                  <a:srgbClr val="1F3D63"/>
+                </a:solidFill>
+                <a:latin typeface="IBM Plex Sans"/>
+              </a:rPr>
+              <a:t>14</a:t>
+            </a:r>
+          </a:p>
+        </p:txBody>
+      </p:sp>
+      <p:sp>
+        <p:nvSpPr>
+          <p:cNvPr id="6" name="TextBox 5"/>
           <p:cNvSpPr txBox="1"/>
           <p:nvPr/>
         </p:nvSpPr>
         <p:spPr>
           <a:xfrm>
-            <a:off x="548640" y="3003530"/>
-            <a:ext cx="5318607" cy="1536699"/>
+            <a:off x="713232" y="3769461"/>
+            <a:ext cx="1706819" cy="237744"/>
           </a:xfrm>
           <a:prstGeom prst="rect">
             <a:avLst/>
@@ -7475,117 +8737,72 @@
           </a:bodyPr>
           <a:lstStyle/>
           <a:p>
-            <a:pPr marL="320040" indent="-228600">
-              <a:spcAft>
-                <a:spcPts val="600"/>
-              </a:spcAft>
-            </a:pPr>
-            <a:r>
-              <a:rPr sz="1750">
-                <a:solidFill>
-                  <a:srgbClr val="1F3D63"/>
-                </a:solidFill>
-                <a:latin typeface="IBM Plex Sans"/>
-              </a:rPr>
-              <a:t>•  </a:t>
-            </a:r>
-            <a:r>
-              <a:rPr sz="1750" b="0" i="0">
-                <a:solidFill>
-                  <a:srgbClr val="14161A"/>
-                </a:solidFill>
-                <a:latin typeface="IBM Plex Sans"/>
-              </a:rPr>
-              <a:t>Upload file, URL, or paste text</a:t>
-            </a:r>
-          </a:p>
-          <a:p>
-            <a:pPr marL="320040" indent="-228600">
-              <a:spcAft>
-                <a:spcPts val="600"/>
-              </a:spcAft>
-            </a:pPr>
-            <a:r>
-              <a:rPr sz="1750">
-                <a:solidFill>
-                  <a:srgbClr val="1F3D63"/>
-                </a:solidFill>
-                <a:latin typeface="IBM Plex Sans"/>
-              </a:rPr>
-              <a:t>•  </a:t>
-            </a:r>
-            <a:r>
-              <a:rPr sz="1750" b="0" i="0">
-                <a:solidFill>
-                  <a:srgbClr val="14161A"/>
-                </a:solidFill>
-                <a:latin typeface="IBM Plex Sans"/>
-              </a:rPr>
-              <a:t>Free web research agent included</a:t>
-            </a:r>
-          </a:p>
-          <a:p>
-            <a:pPr marL="320040" indent="-228600">
-              <a:spcAft>
-                <a:spcPts val="600"/>
-              </a:spcAft>
-            </a:pPr>
-            <a:r>
-              <a:rPr sz="1750">
-                <a:solidFill>
-                  <a:srgbClr val="1F3D63"/>
-                </a:solidFill>
-                <a:latin typeface="IBM Plex Sans"/>
-              </a:rPr>
-              <a:t>•  </a:t>
-            </a:r>
-            <a:r>
-              <a:rPr sz="1750" b="0" i="0">
-                <a:solidFill>
-                  <a:srgbClr val="14161A"/>
-                </a:solidFill>
-                <a:latin typeface="IBM Plex Sans"/>
-              </a:rPr>
-              <a:t>Hybrid BM25 + dense retrieval</a:t>
-            </a:r>
-          </a:p>
-          <a:p>
-            <a:pPr marL="320040" indent="-228600">
-              <a:spcAft>
-                <a:spcPts val="600"/>
-              </a:spcAft>
-            </a:pPr>
-            <a:r>
-              <a:rPr sz="1750">
-                <a:solidFill>
-                  <a:srgbClr val="1F3D63"/>
-                </a:solidFill>
-                <a:latin typeface="IBM Plex Sans"/>
-              </a:rPr>
-              <a:t>•  </a:t>
-            </a:r>
-            <a:r>
-              <a:rPr sz="1750" b="0" i="0">
-                <a:solidFill>
-                  <a:srgbClr val="14161A"/>
-                </a:solidFill>
-                <a:latin typeface="IBM Plex Sans"/>
-              </a:rPr>
-              <a:t>Automatic chunking at 1000 chars</a:t>
-            </a:r>
-          </a:p>
-        </p:txBody>
-      </p:sp>
-      <p:sp>
-        <p:nvSpPr>
-          <p:cNvPr id="6" name="TextBox 5"/>
+            <a:r>
+              <a:rPr sz="1300" b="0" i="0">
+                <a:solidFill>
+                  <a:srgbClr val="5E6B7A"/>
+                </a:solidFill>
+                <a:latin typeface="IBM Plex Sans"/>
+              </a:rPr>
+              <a:t>Block Types</a:t>
+            </a:r>
+          </a:p>
+        </p:txBody>
+      </p:sp>
+      <p:sp>
+        <p:nvSpPr>
+          <p:cNvPr id="7" name="Rounded Rectangle 6"/>
+          <p:cNvSpPr/>
+          <p:nvPr/>
+        </p:nvSpPr>
+        <p:spPr>
+          <a:xfrm>
+            <a:off x="2813243" y="3117189"/>
+            <a:ext cx="2036003" cy="1280160"/>
+          </a:xfrm>
+          <a:prstGeom prst="roundRect">
+            <a:avLst/>
+          </a:prstGeom>
+          <a:solidFill>
+            <a:srgbClr val="EBEEF3"/>
+          </a:solidFill>
+          <a:ln>
+            <a:noFill/>
+          </a:ln>
+          <a:effectLst/>
+        </p:spPr>
+        <p:style>
+          <a:lnRef idx="1">
+            <a:schemeClr val="accent1"/>
+          </a:lnRef>
+          <a:fillRef idx="3">
+            <a:schemeClr val="accent1"/>
+          </a:fillRef>
+          <a:effectRef idx="2">
+            <a:schemeClr val="accent1"/>
+          </a:effectRef>
+          <a:fontRef idx="minor">
+            <a:schemeClr val="lt1"/>
+          </a:fontRef>
+        </p:style>
+        <p:txBody>
+          <a:bodyPr rtlCol="0" anchor="ctr"/>
+          <a:lstStyle/>
+          <a:p>
+            <a:pPr algn="ctr"/>
+          </a:p>
+        </p:txBody>
+      </p:sp>
+      <p:sp>
+        <p:nvSpPr>
+          <p:cNvPr id="8" name="TextBox 7"/>
           <p:cNvSpPr txBox="1"/>
           <p:nvPr/>
         </p:nvSpPr>
         <p:spPr>
           <a:xfrm>
-            <a:off x="6324447" y="2619546"/>
-            <a:ext cx="5318607" cy="350837"/>
+            <a:off x="2977835" y="3281781"/>
+            <a:ext cx="1706819" cy="487680"/>
           </a:xfrm>
           <a:prstGeom prst="rect">
             <a:avLst/>
@@ -7599,27 +8816,27 @@
           <a:lstStyle/>
           <a:p>
             <a:r>
-              <a:rPr sz="2125" b="1" i="0">
-                <a:solidFill>
-                  <a:srgbClr val="14161A"/>
-                </a:solidFill>
-                <a:latin typeface="IBM Plex Sans"/>
-              </a:rPr>
-              <a:t>Generate Artifacts</a:t>
-            </a:r>
-          </a:p>
-        </p:txBody>
-      </p:sp>
-      <p:sp>
-        <p:nvSpPr>
-          <p:cNvPr id="7" name="TextBox 6"/>
+              <a:rPr sz="2400" b="1" i="0">
+                <a:solidFill>
+                  <a:srgbClr val="1F3D63"/>
+                </a:solidFill>
+                <a:latin typeface="IBM Plex Sans"/>
+              </a:rPr>
+              <a:t>6</a:t>
+            </a:r>
+          </a:p>
+        </p:txBody>
+      </p:sp>
+      <p:sp>
+        <p:nvSpPr>
+          <p:cNvPr id="9" name="TextBox 8"/>
           <p:cNvSpPr txBox="1"/>
           <p:nvPr/>
         </p:nvSpPr>
         <p:spPr>
           <a:xfrm>
-            <a:off x="6324447" y="3043535"/>
-            <a:ext cx="5318607" cy="1441450"/>
+            <a:off x="2977835" y="3769461"/>
+            <a:ext cx="1706819" cy="237744"/>
           </a:xfrm>
           <a:prstGeom prst="rect">
             <a:avLst/>
@@ -7632,78 +8849,350 @@
           </a:bodyPr>
           <a:lstStyle/>
           <a:p>
-            <a:pPr marL="320040" indent="-228600">
-              <a:spcAft>
-                <a:spcPts val="600"/>
-              </a:spcAft>
-            </a:pPr>
-            <a:r>
-              <a:rPr sz="1750">
+            <a:r>
+              <a:rPr sz="1300" b="0" i="0">
+                <a:solidFill>
+                  <a:srgbClr val="5E6B7A"/>
+                </a:solidFill>
+                <a:latin typeface="IBM Plex Sans"/>
+              </a:rPr>
+              <a:t>Output Formats</a:t>
+            </a:r>
+          </a:p>
+        </p:txBody>
+      </p:sp>
+      <p:sp>
+        <p:nvSpPr>
+          <p:cNvPr id="10" name="Rounded Rectangle 9"/>
+          <p:cNvSpPr/>
+          <p:nvPr/>
+        </p:nvSpPr>
+        <p:spPr>
+          <a:xfrm>
+            <a:off x="5077846" y="3117189"/>
+            <a:ext cx="2036003" cy="1280160"/>
+          </a:xfrm>
+          <a:prstGeom prst="roundRect">
+            <a:avLst/>
+          </a:prstGeom>
+          <a:solidFill>
+            <a:srgbClr val="EBEEF3"/>
+          </a:solidFill>
+          <a:ln>
+            <a:noFill/>
+          </a:ln>
+          <a:effectLst/>
+        </p:spPr>
+        <p:style>
+          <a:lnRef idx="1">
+            <a:schemeClr val="accent1"/>
+          </a:lnRef>
+          <a:fillRef idx="3">
+            <a:schemeClr val="accent1"/>
+          </a:fillRef>
+          <a:effectRef idx="2">
+            <a:schemeClr val="accent1"/>
+          </a:effectRef>
+          <a:fontRef idx="minor">
+            <a:schemeClr val="lt1"/>
+          </a:fontRef>
+        </p:style>
+        <p:txBody>
+          <a:bodyPr rtlCol="0" anchor="ctr"/>
+          <a:lstStyle/>
+          <a:p>
+            <a:pPr algn="ctr"/>
+          </a:p>
+        </p:txBody>
+      </p:sp>
+      <p:sp>
+        <p:nvSpPr>
+          <p:cNvPr id="11" name="TextBox 10"/>
+          <p:cNvSpPr txBox="1"/>
+          <p:nvPr/>
+        </p:nvSpPr>
+        <p:spPr>
+          <a:xfrm>
+            <a:off x="5242438" y="3281781"/>
+            <a:ext cx="1706819" cy="487680"/>
+          </a:xfrm>
+          <a:prstGeom prst="rect">
+            <a:avLst/>
+          </a:prstGeom>
+          <a:noFill/>
+        </p:spPr>
+        <p:txBody>
+          <a:bodyPr wrap="square" lIns="0" rIns="0" tIns="0" bIns="0">
+            <a:normAutofit/>
+          </a:bodyPr>
+          <a:lstStyle/>
+          <a:p>
+            <a:r>
+              <a:rPr sz="2400" b="1" i="0">
                 <a:solidFill>
                   <a:srgbClr val="1F3D63"/>
                 </a:solidFill>
                 <a:latin typeface="IBM Plex Sans"/>
               </a:rPr>
-              <a:t>•  </a:t>
-            </a:r>
-            <a:r>
-              <a:rPr sz="1750" b="0" i="0">
-                <a:solidFill>
-                  <a:srgbClr val="14161A"/>
-                </a:solidFill>
-                <a:latin typeface="IBM Plex Sans"/>
-              </a:rPr>
-              <a:t>Chat with grounded, cited answers</a:t>
-            </a:r>
-          </a:p>
-          <a:p>
-            <a:pPr marL="320040" indent="-228600">
-              <a:spcAft>
-                <a:spcPts val="600"/>
-              </a:spcAft>
-            </a:pPr>
-            <a:r>
-              <a:rPr sz="1750">
+              <a:t>8</a:t>
+            </a:r>
+          </a:p>
+        </p:txBody>
+      </p:sp>
+      <p:sp>
+        <p:nvSpPr>
+          <p:cNvPr id="12" name="TextBox 11"/>
+          <p:cNvSpPr txBox="1"/>
+          <p:nvPr/>
+        </p:nvSpPr>
+        <p:spPr>
+          <a:xfrm>
+            <a:off x="5242438" y="3769461"/>
+            <a:ext cx="1706819" cy="237744"/>
+          </a:xfrm>
+          <a:prstGeom prst="rect">
+            <a:avLst/>
+          </a:prstGeom>
+          <a:noFill/>
+        </p:spPr>
+        <p:txBody>
+          <a:bodyPr wrap="square" lIns="0" rIns="0" tIns="0" bIns="0">
+            <a:normAutofit/>
+          </a:bodyPr>
+          <a:lstStyle/>
+          <a:p>
+            <a:r>
+              <a:rPr sz="1300" b="0" i="0">
+                <a:solidFill>
+                  <a:srgbClr val="5E6B7A"/>
+                </a:solidFill>
+                <a:latin typeface="IBM Plex Sans"/>
+              </a:rPr>
+              <a:t>Slide Layouts</a:t>
+            </a:r>
+          </a:p>
+        </p:txBody>
+      </p:sp>
+      <p:sp>
+        <p:nvSpPr>
+          <p:cNvPr id="13" name="Rounded Rectangle 12"/>
+          <p:cNvSpPr/>
+          <p:nvPr/>
+        </p:nvSpPr>
+        <p:spPr>
+          <a:xfrm>
+            <a:off x="7342449" y="3117189"/>
+            <a:ext cx="2036003" cy="1280160"/>
+          </a:xfrm>
+          <a:prstGeom prst="roundRect">
+            <a:avLst/>
+          </a:prstGeom>
+          <a:solidFill>
+            <a:srgbClr val="EBEEF3"/>
+          </a:solidFill>
+          <a:ln>
+            <a:noFill/>
+          </a:ln>
+          <a:effectLst/>
+        </p:spPr>
+        <p:style>
+          <a:lnRef idx="1">
+            <a:schemeClr val="accent1"/>
+          </a:lnRef>
+          <a:fillRef idx="3">
+            <a:schemeClr val="accent1"/>
+          </a:fillRef>
+          <a:effectRef idx="2">
+            <a:schemeClr val="accent1"/>
+          </a:effectRef>
+          <a:fontRef idx="minor">
+            <a:schemeClr val="lt1"/>
+          </a:fontRef>
+        </p:style>
+        <p:txBody>
+          <a:bodyPr rtlCol="0" anchor="ctr"/>
+          <a:lstStyle/>
+          <a:p>
+            <a:pPr algn="ctr"/>
+          </a:p>
+        </p:txBody>
+      </p:sp>
+      <p:sp>
+        <p:nvSpPr>
+          <p:cNvPr id="14" name="TextBox 13"/>
+          <p:cNvSpPr txBox="1"/>
+          <p:nvPr/>
+        </p:nvSpPr>
+        <p:spPr>
+          <a:xfrm>
+            <a:off x="7507041" y="3281781"/>
+            <a:ext cx="1706819" cy="487680"/>
+          </a:xfrm>
+          <a:prstGeom prst="rect">
+            <a:avLst/>
+          </a:prstGeom>
+          <a:noFill/>
+        </p:spPr>
+        <p:txBody>
+          <a:bodyPr wrap="square" lIns="0" rIns="0" tIns="0" bIns="0">
+            <a:normAutofit/>
+          </a:bodyPr>
+          <a:lstStyle/>
+          <a:p>
+            <a:r>
+              <a:rPr sz="2400" b="1" i="0">
                 <a:solidFill>
                   <a:srgbClr val="1F3D63"/>
                 </a:solidFill>
                 <a:latin typeface="IBM Plex Sans"/>
               </a:rPr>
-              <a:t>•  </a:t>
-            </a:r>
-            <a:r>
-              <a:rPr sz="1750" b="0" i="0">
-                <a:solidFill>
-                  <a:srgbClr val="14161A"/>
-                </a:solidFill>
-                <a:latin typeface="IBM Plex Sans"/>
-              </a:rPr>
-              <a:t>5 one-click guides (briefing, FAQ, timeline)</a:t>
-            </a:r>
-          </a:p>
-          <a:p>
-            <a:pPr marL="320040" indent="-228600">
-              <a:spcAft>
-                <a:spcPts val="600"/>
-              </a:spcAft>
-            </a:pPr>
-            <a:r>
-              <a:rPr sz="1750">
+              <a:t>7</a:t>
+            </a:r>
+          </a:p>
+        </p:txBody>
+      </p:sp>
+      <p:sp>
+        <p:nvSpPr>
+          <p:cNvPr id="15" name="TextBox 14"/>
+          <p:cNvSpPr txBox="1"/>
+          <p:nvPr/>
+        </p:nvSpPr>
+        <p:spPr>
+          <a:xfrm>
+            <a:off x="7507041" y="3769461"/>
+            <a:ext cx="1706819" cy="237744"/>
+          </a:xfrm>
+          <a:prstGeom prst="rect">
+            <a:avLst/>
+          </a:prstGeom>
+          <a:noFill/>
+        </p:spPr>
+        <p:txBody>
+          <a:bodyPr wrap="square" lIns="0" rIns="0" tIns="0" bIns="0">
+            <a:normAutofit/>
+          </a:bodyPr>
+          <a:lstStyle/>
+          <a:p>
+            <a:r>
+              <a:rPr sz="1300" b="0" i="0">
+                <a:solidFill>
+                  <a:srgbClr val="5E6B7A"/>
+                </a:solidFill>
+                <a:latin typeface="IBM Plex Sans"/>
+              </a:rPr>
+              <a:t>Diagram Node Types</a:t>
+            </a:r>
+          </a:p>
+        </p:txBody>
+      </p:sp>
+      <p:sp>
+        <p:nvSpPr>
+          <p:cNvPr id="16" name="Rounded Rectangle 15"/>
+          <p:cNvSpPr/>
+          <p:nvPr/>
+        </p:nvSpPr>
+        <p:spPr>
+          <a:xfrm>
+            <a:off x="9607052" y="3117189"/>
+            <a:ext cx="2036003" cy="1280160"/>
+          </a:xfrm>
+          <a:prstGeom prst="roundRect">
+            <a:avLst/>
+          </a:prstGeom>
+          <a:solidFill>
+            <a:srgbClr val="EBEEF3"/>
+          </a:solidFill>
+          <a:ln>
+            <a:noFill/>
+          </a:ln>
+          <a:effectLst/>
+        </p:spPr>
+        <p:style>
+          <a:lnRef idx="1">
+            <a:schemeClr val="accent1"/>
+          </a:lnRef>
+          <a:fillRef idx="3">
+            <a:schemeClr val="accent1"/>
+          </a:fillRef>
+          <a:effectRef idx="2">
+            <a:schemeClr val="accent1"/>
+          </a:effectRef>
+          <a:fontRef idx="minor">
+            <a:schemeClr val="lt1"/>
+          </a:fontRef>
+        </p:style>
+        <p:txBody>
+          <a:bodyPr rtlCol="0" anchor="ctr"/>
+          <a:lstStyle/>
+          <a:p>
+            <a:pPr algn="ctr"/>
+          </a:p>
+        </p:txBody>
+      </p:sp>
+      <p:sp>
+        <p:nvSpPr>
+          <p:cNvPr id="17" name="TextBox 16"/>
+          <p:cNvSpPr txBox="1"/>
+          <p:nvPr/>
+        </p:nvSpPr>
+        <p:spPr>
+          <a:xfrm>
+            <a:off x="9771644" y="3281781"/>
+            <a:ext cx="1706819" cy="487680"/>
+          </a:xfrm>
+          <a:prstGeom prst="rect">
+            <a:avLst/>
+          </a:prstGeom>
+          <a:noFill/>
+        </p:spPr>
+        <p:txBody>
+          <a:bodyPr wrap="square" lIns="0" rIns="0" tIns="0" bIns="0">
+            <a:normAutofit/>
+          </a:bodyPr>
+          <a:lstStyle/>
+          <a:p>
+            <a:r>
+              <a:rPr sz="2400" b="1" i="0">
                 <a:solidFill>
                   <a:srgbClr val="1F3D63"/>
                 </a:solidFill>
                 <a:latin typeface="IBM Plex Sans"/>
               </a:rPr>
-              <a:t>•  </a:t>
-            </a:r>
-            <a:r>
-              <a:rPr sz="1750" b="0" i="0">
-                <a:solidFill>
-                  <a:srgbClr val="14161A"/>
-                </a:solidFill>
-                <a:latin typeface="IBM Plex Sans"/>
-              </a:rPr>
-              <a:t>6 artifact kinds: deck, doc, sheet, diagram, infographic, podcast</a:t>
+              <a:t>658+</a:t>
+            </a:r>
+          </a:p>
+        </p:txBody>
+      </p:sp>
+      <p:sp>
+        <p:nvSpPr>
+          <p:cNvPr id="18" name="TextBox 17"/>
+          <p:cNvSpPr txBox="1"/>
+          <p:nvPr/>
+        </p:nvSpPr>
+        <p:spPr>
+          <a:xfrm>
+            <a:off x="9771644" y="3769461"/>
+            <a:ext cx="1706819" cy="237744"/>
+          </a:xfrm>
+          <a:prstGeom prst="rect">
+            <a:avLst/>
+          </a:prstGeom>
+          <a:noFill/>
+        </p:spPr>
+        <p:txBody>
+          <a:bodyPr wrap="square" lIns="0" rIns="0" tIns="0" bIns="0">
+            <a:normAutofit/>
+          </a:bodyPr>
+          <a:lstStyle/>
+          <a:p>
+            <a:r>
+              <a:rPr sz="1300" b="0" i="0">
+                <a:solidFill>
+                  <a:srgbClr val="5E6B7A"/>
+                </a:solidFill>
+                <a:latin typeface="IBM Plex Sans"/>
+              </a:rPr>
+              <a:t>Tests (Passing)</a:t>
             </a:r>
           </a:p>
         </p:txBody>
@@ -7757,13 +9246,13 @@
           <a:lstStyle/>
           <a:p>
             <a:r>
-              <a:rPr sz="2600" b="1" i="0">
+              <a:rPr sz="3000" b="1" i="0">
                 <a:solidFill>
                   <a:srgbClr val="14161A"/>
                 </a:solidFill>
                 <a:latin typeface="IBM Plex Sans"/>
               </a:rPr>
-              <a:t>Keep Text Legible at Any Scale</a:t>
+              <a:t>Generate Six Native Formats from One IR</a:t>
             </a:r>
           </a:p>
         </p:txBody>
@@ -7777,7 +9266,7 @@
         <p:spPr>
           <a:xfrm>
             <a:off x="548640" y="1042416"/>
-            <a:ext cx="11094415" cy="25603"/>
+            <a:ext cx="1097280" cy="25603"/>
           </a:xfrm>
           <a:prstGeom prst="rect">
             <a:avLst/>
@@ -7820,8 +9309,8 @@
         </p:nvSpPr>
         <p:spPr>
           <a:xfrm>
-            <a:off x="548640" y="2122577"/>
-            <a:ext cx="11094415" cy="1920874"/>
+            <a:off x="548640" y="2464788"/>
+            <a:ext cx="11094415" cy="2305049"/>
           </a:xfrm>
           <a:prstGeom prst="rect">
             <a:avLst/>
@@ -7855,7 +9344,7 @@
                 </a:solidFill>
                 <a:latin typeface="IBM Plex Sans"/>
               </a:rPr>
-              <a:t>Measured autofit: real text extents via FreeType against actual fonts</a:t>
+              <a:t>PPTX: native editable charts, autofit text, native shapes</a:t>
             </a:r>
           </a:p>
           <a:p>
@@ -7880,7 +9369,7 @@
                 </a:solidFill>
                 <a:latin typeface="IBM Plex Sans"/>
               </a:rPr>
-              <a:t>WCAG 2.x contrast ratio checking: 4.5:1 for normal text</a:t>
+              <a:t>DOCX: hardened tables, repeating headers, fixed column widths</a:t>
             </a:r>
           </a:p>
           <a:p>
@@ -7905,7 +9394,7 @@
                 </a:solidFill>
                 <a:latin typeface="IBM Plex Sans"/>
               </a:rPr>
-              <a:t>Diagram legibility: labels never truncated, step down detail instead</a:t>
+              <a:t>XLSX: typed cells, formulas, number formats</a:t>
             </a:r>
           </a:p>
           <a:p>
@@ -7930,7 +9419,7 @@
                 </a:solidFill>
                 <a:latin typeface="IBM Plex Sans"/>
               </a:rPr>
-              <a:t>Table hardening: fixed widths, repeating headers, split prevention</a:t>
+              <a:t>PDF: Typst compiled in-process, no LaTeX needed</a:t>
             </a:r>
           </a:p>
           <a:p>
@@ -7955,129 +9444,32 @@
                 </a:solidFill>
                 <a:latin typeface="IBM Plex Sans"/>
               </a:rPr>
-              <a:t>Geometric QA: off-slide detection, overlap checks, font sprawl</a:t>
-            </a:r>
-          </a:p>
-        </p:txBody>
-      </p:sp>
-      <p:sp>
-        <p:nvSpPr>
-          <p:cNvPr id="5" name="Rectangle 4"/>
-          <p:cNvSpPr/>
-          <p:nvPr/>
-        </p:nvSpPr>
-        <p:spPr>
-          <a:xfrm>
-            <a:off x="548640" y="4646956"/>
-            <a:ext cx="11094415" cy="524319"/>
-          </a:xfrm>
-          <a:prstGeom prst="rect">
-            <a:avLst/>
-          </a:prstGeom>
-          <a:solidFill>
-            <a:srgbClr val="DBE3ED"/>
-          </a:solidFill>
-          <a:ln>
-            <a:noFill/>
-          </a:ln>
-          <a:effectLst/>
-        </p:spPr>
-        <p:style>
-          <a:lnRef idx="1">
-            <a:schemeClr val="accent1"/>
-          </a:lnRef>
-          <a:fillRef idx="3">
-            <a:schemeClr val="accent1"/>
-          </a:fillRef>
-          <a:effectRef idx="2">
-            <a:schemeClr val="accent1"/>
-          </a:effectRef>
-          <a:fontRef idx="minor">
-            <a:schemeClr val="lt1"/>
-          </a:fontRef>
-        </p:style>
-        <p:txBody>
-          <a:bodyPr rtlCol="0" anchor="ctr"/>
-          <a:lstStyle/>
-          <a:p>
-            <a:pPr algn="ctr"/>
-          </a:p>
-        </p:txBody>
-      </p:sp>
-      <p:sp>
-        <p:nvSpPr>
-          <p:cNvPr id="6" name="Rectangle 5"/>
-          <p:cNvSpPr/>
-          <p:nvPr/>
-        </p:nvSpPr>
-        <p:spPr>
-          <a:xfrm>
-            <a:off x="548640" y="4646956"/>
-            <a:ext cx="73152" cy="524319"/>
-          </a:xfrm>
-          <a:prstGeom prst="rect">
-            <a:avLst/>
-          </a:prstGeom>
-          <a:solidFill>
-            <a:srgbClr val="2F62A0"/>
-          </a:solidFill>
-          <a:ln>
-            <a:noFill/>
-          </a:ln>
-          <a:effectLst/>
-        </p:spPr>
-        <p:style>
-          <a:lnRef idx="1">
-            <a:schemeClr val="accent1"/>
-          </a:lnRef>
-          <a:fillRef idx="3">
-            <a:schemeClr val="accent1"/>
-          </a:fillRef>
-          <a:effectRef idx="2">
-            <a:schemeClr val="accent1"/>
-          </a:effectRef>
-          <a:fontRef idx="minor">
-            <a:schemeClr val="lt1"/>
-          </a:fontRef>
-        </p:style>
-        <p:txBody>
-          <a:bodyPr rtlCol="0" anchor="ctr"/>
-          <a:lstStyle/>
-          <a:p>
-            <a:pPr algn="ctr"/>
-          </a:p>
-        </p:txBody>
-      </p:sp>
-      <p:sp>
-        <p:nvSpPr>
-          <p:cNvPr id="7" name="TextBox 6"/>
-          <p:cNvSpPr txBox="1"/>
-          <p:nvPr/>
-        </p:nvSpPr>
-        <p:spPr>
-          <a:xfrm>
-            <a:off x="749808" y="4774972"/>
-            <a:ext cx="10765231" cy="268287"/>
-          </a:xfrm>
-          <a:prstGeom prst="rect">
-            <a:avLst/>
-          </a:prstGeom>
-          <a:noFill/>
-        </p:spPr>
-        <p:txBody>
-          <a:bodyPr wrap="square" lIns="0" rIns="0" tIns="0" bIns="0">
-            <a:normAutofit/>
-          </a:bodyPr>
-          <a:lstStyle/>
-          <a:p>
-            <a:r>
-              <a:rPr sz="1625" b="0" i="0">
+              <a:t>HTML: semantic markup with WCAG 2.x contrast</a:t>
+            </a:r>
+          </a:p>
+          <a:p>
+            <a:pPr marL="320040" indent="-228600">
+              <a:spcAft>
+                <a:spcPts val="600"/>
+              </a:spcAft>
+            </a:pPr>
+            <a:r>
+              <a:rPr sz="1750">
+                <a:solidFill>
+                  <a:srgbClr val="1F3D63"/>
+                </a:solidFill>
+                <a:latin typeface="IBM Plex Sans"/>
+              </a:rPr>
+              <a:t>•  </a:t>
+            </a:r>
+            <a:r>
+              <a:rPr sz="1750" b="0" i="0">
                 <a:solidFill>
                   <a:srgbClr val="14161A"/>
                 </a:solidFill>
                 <a:latin typeface="IBM Plex Sans"/>
               </a:rPr>
-              <a:t>Design principle: lint before render. Only error severity blocks a render; warnings help improve.</a:t>
+              <a:t>Markdown: clean, readable prose</a:t>
             </a:r>
           </a:p>
         </p:txBody>
@@ -8131,13 +9523,13 @@
           <a:lstStyle/>
           <a:p>
             <a:r>
-              <a:rPr sz="2600" b="1" i="0">
+              <a:rPr sz="3000" b="1" i="0">
                 <a:solidFill>
                   <a:srgbClr val="14161A"/>
                 </a:solidFill>
                 <a:latin typeface="IBM Plex Sans"/>
               </a:rPr>
-              <a:t>Local-First, Offline-Ready, Multi-Tenant-Safe</a:t>
+              <a:t>Build documents from families of typed blocks</a:t>
             </a:r>
           </a:p>
         </p:txBody>
@@ -8151,7 +9543,7 @@
         <p:spPr>
           <a:xfrm>
             <a:off x="548640" y="1042416"/>
-            <a:ext cx="11094415" cy="25603"/>
+            <a:ext cx="1097280" cy="25603"/>
           </a:xfrm>
           <a:prstGeom prst="rect">
             <a:avLst/>
@@ -8188,14 +9580,106 @@
       </p:sp>
       <p:sp>
         <p:nvSpPr>
-          <p:cNvPr id="4" name="TextBox 3"/>
+          <p:cNvPr id="4" name="Rounded Rectangle 3"/>
+          <p:cNvSpPr/>
+          <p:nvPr/>
+        </p:nvSpPr>
+        <p:spPr>
+          <a:xfrm>
+            <a:off x="548640" y="2711904"/>
+            <a:ext cx="3600602" cy="804799"/>
+          </a:xfrm>
+          <a:prstGeom prst="roundRect">
+            <a:avLst>
+              <a:gd name="adj" fmla="val 10000"/>
+            </a:avLst>
+          </a:prstGeom>
+          <a:solidFill>
+            <a:srgbClr val="EAEDF1"/>
+          </a:solidFill>
+          <a:ln w="9525">
+            <a:solidFill>
+              <a:srgbClr val="6D819A"/>
+            </a:solidFill>
+          </a:ln>
+          <a:effectLst/>
+        </p:spPr>
+        <p:style>
+          <a:lnRef idx="1">
+            <a:schemeClr val="accent1"/>
+          </a:lnRef>
+          <a:fillRef idx="3">
+            <a:schemeClr val="accent1"/>
+          </a:fillRef>
+          <a:effectRef idx="2">
+            <a:schemeClr val="accent1"/>
+          </a:effectRef>
+          <a:fontRef idx="minor">
+            <a:schemeClr val="lt1"/>
+          </a:fontRef>
+        </p:style>
+        <p:txBody>
+          <a:bodyPr rtlCol="0" anchor="ctr"/>
+          <a:lstStyle/>
+          <a:p>
+            <a:pPr algn="ctr"/>
+          </a:p>
+        </p:txBody>
+      </p:sp>
+      <p:sp>
+        <p:nvSpPr>
+          <p:cNvPr id="5" name="Rectangle 4"/>
+          <p:cNvSpPr/>
+          <p:nvPr/>
+        </p:nvSpPr>
+        <p:spPr>
+          <a:xfrm>
+            <a:off x="694944" y="2858208"/>
+            <a:ext cx="164592" cy="164592"/>
+          </a:xfrm>
+          <a:prstGeom prst="rect">
+            <a:avLst/>
+          </a:prstGeom>
+          <a:solidFill>
+            <a:srgbClr val="1F3D63"/>
+          </a:solidFill>
+          <a:ln>
+            <a:noFill/>
+          </a:ln>
+          <a:effectLst/>
+        </p:spPr>
+        <p:style>
+          <a:lnRef idx="1">
+            <a:schemeClr val="accent1"/>
+          </a:lnRef>
+          <a:fillRef idx="3">
+            <a:schemeClr val="accent1"/>
+          </a:fillRef>
+          <a:effectRef idx="2">
+            <a:schemeClr val="accent1"/>
+          </a:effectRef>
+          <a:fontRef idx="minor">
+            <a:schemeClr val="lt1"/>
+          </a:fontRef>
+        </p:style>
+        <p:txBody>
+          <a:bodyPr rtlCol="0" anchor="ctr"/>
+          <a:lstStyle/>
+          <a:p>
+            <a:pPr algn="ctr"/>
+          </a:p>
+        </p:txBody>
+      </p:sp>
+      <p:sp>
+        <p:nvSpPr>
+          <p:cNvPr id="6" name="TextBox 5"/>
           <p:cNvSpPr txBox="1"/>
           <p:nvPr/>
         </p:nvSpPr>
         <p:spPr>
           <a:xfrm>
-            <a:off x="548640" y="2596263"/>
-            <a:ext cx="11094415" cy="1920874"/>
+            <a:off x="694944" y="3150816"/>
+            <a:ext cx="3307994" cy="219583"/>
           </a:xfrm>
           <a:prstGeom prst="rect">
             <a:avLst/>
@@ -8208,128 +9692,518 @@
           </a:bodyPr>
           <a:lstStyle/>
           <a:p>
-            <a:pPr marL="320040" indent="-228600">
-              <a:spcAft>
-                <a:spcPts val="600"/>
-              </a:spcAft>
-            </a:pPr>
-            <a:r>
-              <a:rPr sz="1750">
-                <a:solidFill>
-                  <a:srgbClr val="1F3D63"/>
-                </a:solidFill>
-                <a:latin typeface="IBM Plex Sans"/>
-              </a:rPr>
-              <a:t>•  </a:t>
-            </a:r>
-            <a:r>
-              <a:rPr sz="1750" b="0" i="0">
+            <a:r>
+              <a:rPr sz="1330" b="1" i="0">
                 <a:solidFill>
                   <a:srgbClr val="14161A"/>
                 </a:solidFill>
                 <a:latin typeface="IBM Plex Sans"/>
               </a:rPr>
-              <a:t>Runs fully offline against a local model (ollama, llama.cpp, etc.)</a:t>
-            </a:r>
-          </a:p>
-          <a:p>
-            <a:pPr marL="320040" indent="-228600">
-              <a:spcAft>
-                <a:spcPts val="600"/>
-              </a:spcAft>
-            </a:pPr>
-            <a:r>
-              <a:rPr sz="1750">
-                <a:solidFill>
-                  <a:srgbClr val="1F3D63"/>
-                </a:solidFill>
-                <a:latin typeface="IBM Plex Sans"/>
-              </a:rPr>
-              <a:t>•  </a:t>
-            </a:r>
-            <a:r>
-              <a:rPr sz="1750" b="0" i="0">
+              <a:t>Text &amp; headings</a:t>
+            </a:r>
+          </a:p>
+        </p:txBody>
+      </p:sp>
+      <p:sp>
+        <p:nvSpPr>
+          <p:cNvPr id="7" name="Rounded Rectangle 6"/>
+          <p:cNvSpPr/>
+          <p:nvPr/>
+        </p:nvSpPr>
+        <p:spPr>
+          <a:xfrm>
+            <a:off x="4295546" y="2711904"/>
+            <a:ext cx="3600602" cy="804799"/>
+          </a:xfrm>
+          <a:prstGeom prst="roundRect">
+            <a:avLst>
+              <a:gd name="adj" fmla="val 10000"/>
+            </a:avLst>
+          </a:prstGeom>
+          <a:solidFill>
+            <a:srgbClr val="EAEDF1"/>
+          </a:solidFill>
+          <a:ln w="9525">
+            <a:solidFill>
+              <a:srgbClr val="6D819A"/>
+            </a:solidFill>
+          </a:ln>
+          <a:effectLst/>
+        </p:spPr>
+        <p:style>
+          <a:lnRef idx="1">
+            <a:schemeClr val="accent1"/>
+          </a:lnRef>
+          <a:fillRef idx="3">
+            <a:schemeClr val="accent1"/>
+          </a:fillRef>
+          <a:effectRef idx="2">
+            <a:schemeClr val="accent1"/>
+          </a:effectRef>
+          <a:fontRef idx="minor">
+            <a:schemeClr val="lt1"/>
+          </a:fontRef>
+        </p:style>
+        <p:txBody>
+          <a:bodyPr rtlCol="0" anchor="ctr"/>
+          <a:lstStyle/>
+          <a:p>
+            <a:pPr algn="ctr"/>
+          </a:p>
+        </p:txBody>
+      </p:sp>
+      <p:sp>
+        <p:nvSpPr>
+          <p:cNvPr id="8" name="Rectangle 7"/>
+          <p:cNvSpPr/>
+          <p:nvPr/>
+        </p:nvSpPr>
+        <p:spPr>
+          <a:xfrm>
+            <a:off x="4441850" y="2858208"/>
+            <a:ext cx="164592" cy="164592"/>
+          </a:xfrm>
+          <a:prstGeom prst="rect">
+            <a:avLst/>
+          </a:prstGeom>
+          <a:solidFill>
+            <a:srgbClr val="1F3D63"/>
+          </a:solidFill>
+          <a:ln>
+            <a:noFill/>
+          </a:ln>
+          <a:effectLst/>
+        </p:spPr>
+        <p:style>
+          <a:lnRef idx="1">
+            <a:schemeClr val="accent1"/>
+          </a:lnRef>
+          <a:fillRef idx="3">
+            <a:schemeClr val="accent1"/>
+          </a:fillRef>
+          <a:effectRef idx="2">
+            <a:schemeClr val="accent1"/>
+          </a:effectRef>
+          <a:fontRef idx="minor">
+            <a:schemeClr val="lt1"/>
+          </a:fontRef>
+        </p:style>
+        <p:txBody>
+          <a:bodyPr rtlCol="0" anchor="ctr"/>
+          <a:lstStyle/>
+          <a:p>
+            <a:pPr algn="ctr"/>
+          </a:p>
+        </p:txBody>
+      </p:sp>
+      <p:sp>
+        <p:nvSpPr>
+          <p:cNvPr id="9" name="TextBox 8"/>
+          <p:cNvSpPr txBox="1"/>
+          <p:nvPr/>
+        </p:nvSpPr>
+        <p:spPr>
+          <a:xfrm>
+            <a:off x="4441850" y="3150816"/>
+            <a:ext cx="3307994" cy="219583"/>
+          </a:xfrm>
+          <a:prstGeom prst="rect">
+            <a:avLst/>
+          </a:prstGeom>
+          <a:noFill/>
+        </p:spPr>
+        <p:txBody>
+          <a:bodyPr wrap="square" lIns="0" rIns="0" tIns="0" bIns="0">
+            <a:normAutofit/>
+          </a:bodyPr>
+          <a:lstStyle/>
+          <a:p>
+            <a:r>
+              <a:rPr sz="1330" b="1" i="0">
                 <a:solidFill>
                   <a:srgbClr val="14161A"/>
                 </a:solidFill>
                 <a:latin typeface="IBM Plex Sans"/>
               </a:rPr>
-              <a:t>SQLite default, Postgres for scale</a:t>
-            </a:r>
-          </a:p>
-          <a:p>
-            <a:pPr marL="320040" indent="-228600">
-              <a:spcAft>
-                <a:spcPts val="600"/>
-              </a:spcAft>
-            </a:pPr>
-            <a:r>
-              <a:rPr sz="1750">
-                <a:solidFill>
-                  <a:srgbClr val="1F3D63"/>
-                </a:solidFill>
-                <a:latin typeface="IBM Plex Sans"/>
-              </a:rPr>
-              <a:t>•  </a:t>
-            </a:r>
-            <a:r>
-              <a:rPr sz="1750" b="0" i="0">
+              <a:t>Tables &amp; charts</a:t>
+            </a:r>
+          </a:p>
+        </p:txBody>
+      </p:sp>
+      <p:sp>
+        <p:nvSpPr>
+          <p:cNvPr id="10" name="Rounded Rectangle 9"/>
+          <p:cNvSpPr/>
+          <p:nvPr/>
+        </p:nvSpPr>
+        <p:spPr>
+          <a:xfrm>
+            <a:off x="8042452" y="2711904"/>
+            <a:ext cx="3600602" cy="804799"/>
+          </a:xfrm>
+          <a:prstGeom prst="roundRect">
+            <a:avLst>
+              <a:gd name="adj" fmla="val 10000"/>
+            </a:avLst>
+          </a:prstGeom>
+          <a:solidFill>
+            <a:srgbClr val="EAEDF1"/>
+          </a:solidFill>
+          <a:ln w="9525">
+            <a:solidFill>
+              <a:srgbClr val="6D819A"/>
+            </a:solidFill>
+          </a:ln>
+          <a:effectLst/>
+        </p:spPr>
+        <p:style>
+          <a:lnRef idx="1">
+            <a:schemeClr val="accent1"/>
+          </a:lnRef>
+          <a:fillRef idx="3">
+            <a:schemeClr val="accent1"/>
+          </a:fillRef>
+          <a:effectRef idx="2">
+            <a:schemeClr val="accent1"/>
+          </a:effectRef>
+          <a:fontRef idx="minor">
+            <a:schemeClr val="lt1"/>
+          </a:fontRef>
+        </p:style>
+        <p:txBody>
+          <a:bodyPr rtlCol="0" anchor="ctr"/>
+          <a:lstStyle/>
+          <a:p>
+            <a:pPr algn="ctr"/>
+          </a:p>
+        </p:txBody>
+      </p:sp>
+      <p:sp>
+        <p:nvSpPr>
+          <p:cNvPr id="11" name="Rectangle 10"/>
+          <p:cNvSpPr/>
+          <p:nvPr/>
+        </p:nvSpPr>
+        <p:spPr>
+          <a:xfrm>
+            <a:off x="8188756" y="2858208"/>
+            <a:ext cx="164592" cy="164592"/>
+          </a:xfrm>
+          <a:prstGeom prst="rect">
+            <a:avLst/>
+          </a:prstGeom>
+          <a:solidFill>
+            <a:srgbClr val="1F3D63"/>
+          </a:solidFill>
+          <a:ln>
+            <a:noFill/>
+          </a:ln>
+          <a:effectLst/>
+        </p:spPr>
+        <p:style>
+          <a:lnRef idx="1">
+            <a:schemeClr val="accent1"/>
+          </a:lnRef>
+          <a:fillRef idx="3">
+            <a:schemeClr val="accent1"/>
+          </a:fillRef>
+          <a:effectRef idx="2">
+            <a:schemeClr val="accent1"/>
+          </a:effectRef>
+          <a:fontRef idx="minor">
+            <a:schemeClr val="lt1"/>
+          </a:fontRef>
+        </p:style>
+        <p:txBody>
+          <a:bodyPr rtlCol="0" anchor="ctr"/>
+          <a:lstStyle/>
+          <a:p>
+            <a:pPr algn="ctr"/>
+          </a:p>
+        </p:txBody>
+      </p:sp>
+      <p:sp>
+        <p:nvSpPr>
+          <p:cNvPr id="12" name="TextBox 11"/>
+          <p:cNvSpPr txBox="1"/>
+          <p:nvPr/>
+        </p:nvSpPr>
+        <p:spPr>
+          <a:xfrm>
+            <a:off x="8188756" y="3150816"/>
+            <a:ext cx="3307994" cy="219583"/>
+          </a:xfrm>
+          <a:prstGeom prst="rect">
+            <a:avLst/>
+          </a:prstGeom>
+          <a:noFill/>
+        </p:spPr>
+        <p:txBody>
+          <a:bodyPr wrap="square" lIns="0" rIns="0" tIns="0" bIns="0">
+            <a:normAutofit/>
+          </a:bodyPr>
+          <a:lstStyle/>
+          <a:p>
+            <a:r>
+              <a:rPr sz="1330" b="1" i="0">
                 <a:solidFill>
                   <a:srgbClr val="14161A"/>
                 </a:solidFill>
                 <a:latin typeface="IBM Plex Sans"/>
               </a:rPr>
-              <a:t>Session tokens stored only as SHA-256 hashes</a:t>
-            </a:r>
-          </a:p>
-          <a:p>
-            <a:pPr marL="320040" indent="-228600">
-              <a:spcAft>
-                <a:spcPts val="600"/>
-              </a:spcAft>
-            </a:pPr>
-            <a:r>
-              <a:rPr sz="1750">
-                <a:solidFill>
-                  <a:srgbClr val="1F3D63"/>
-                </a:solidFill>
-                <a:latin typeface="IBM Plex Sans"/>
-              </a:rPr>
-              <a:t>•  </a:t>
-            </a:r>
-            <a:r>
-              <a:rPr sz="1750" b="0" i="0">
+              <a:t>Stats &amp; callouts</a:t>
+            </a:r>
+          </a:p>
+        </p:txBody>
+      </p:sp>
+      <p:sp>
+        <p:nvSpPr>
+          <p:cNvPr id="13" name="Rounded Rectangle 12"/>
+          <p:cNvSpPr/>
+          <p:nvPr/>
+        </p:nvSpPr>
+        <p:spPr>
+          <a:xfrm>
+            <a:off x="548640" y="3663007"/>
+            <a:ext cx="3600602" cy="804799"/>
+          </a:xfrm>
+          <a:prstGeom prst="roundRect">
+            <a:avLst>
+              <a:gd name="adj" fmla="val 10000"/>
+            </a:avLst>
+          </a:prstGeom>
+          <a:solidFill>
+            <a:srgbClr val="EAEDF1"/>
+          </a:solidFill>
+          <a:ln w="9525">
+            <a:solidFill>
+              <a:srgbClr val="6D819A"/>
+            </a:solidFill>
+          </a:ln>
+          <a:effectLst/>
+        </p:spPr>
+        <p:style>
+          <a:lnRef idx="1">
+            <a:schemeClr val="accent1"/>
+          </a:lnRef>
+          <a:fillRef idx="3">
+            <a:schemeClr val="accent1"/>
+          </a:fillRef>
+          <a:effectRef idx="2">
+            <a:schemeClr val="accent1"/>
+          </a:effectRef>
+          <a:fontRef idx="minor">
+            <a:schemeClr val="lt1"/>
+          </a:fontRef>
+        </p:style>
+        <p:txBody>
+          <a:bodyPr rtlCol="0" anchor="ctr"/>
+          <a:lstStyle/>
+          <a:p>
+            <a:pPr algn="ctr"/>
+          </a:p>
+        </p:txBody>
+      </p:sp>
+      <p:sp>
+        <p:nvSpPr>
+          <p:cNvPr id="14" name="Rectangle 13"/>
+          <p:cNvSpPr/>
+          <p:nvPr/>
+        </p:nvSpPr>
+        <p:spPr>
+          <a:xfrm>
+            <a:off x="694944" y="3809311"/>
+            <a:ext cx="164592" cy="164592"/>
+          </a:xfrm>
+          <a:prstGeom prst="rect">
+            <a:avLst/>
+          </a:prstGeom>
+          <a:solidFill>
+            <a:srgbClr val="1F3D63"/>
+          </a:solidFill>
+          <a:ln>
+            <a:noFill/>
+          </a:ln>
+          <a:effectLst/>
+        </p:spPr>
+        <p:style>
+          <a:lnRef idx="1">
+            <a:schemeClr val="accent1"/>
+          </a:lnRef>
+          <a:fillRef idx="3">
+            <a:schemeClr val="accent1"/>
+          </a:fillRef>
+          <a:effectRef idx="2">
+            <a:schemeClr val="accent1"/>
+          </a:effectRef>
+          <a:fontRef idx="minor">
+            <a:schemeClr val="lt1"/>
+          </a:fontRef>
+        </p:style>
+        <p:txBody>
+          <a:bodyPr rtlCol="0" anchor="ctr"/>
+          <a:lstStyle/>
+          <a:p>
+            <a:pPr algn="ctr"/>
+          </a:p>
+        </p:txBody>
+      </p:sp>
+      <p:sp>
+        <p:nvSpPr>
+          <p:cNvPr id="15" name="TextBox 14"/>
+          <p:cNvSpPr txBox="1"/>
+          <p:nvPr/>
+        </p:nvSpPr>
+        <p:spPr>
+          <a:xfrm>
+            <a:off x="694944" y="4101919"/>
+            <a:ext cx="3307994" cy="219583"/>
+          </a:xfrm>
+          <a:prstGeom prst="rect">
+            <a:avLst/>
+          </a:prstGeom>
+          <a:noFill/>
+        </p:spPr>
+        <p:txBody>
+          <a:bodyPr wrap="square" lIns="0" rIns="0" tIns="0" bIns="0">
+            <a:normAutofit/>
+          </a:bodyPr>
+          <a:lstStyle/>
+          <a:p>
+            <a:r>
+              <a:rPr sz="1330" b="1" i="0">
                 <a:solidFill>
                   <a:srgbClr val="14161A"/>
                 </a:solidFill>
                 <a:latin typeface="IBM Plex Sans"/>
               </a:rPr>
-              <a:t>Cross-tenant access returns 404, not 403</a:t>
-            </a:r>
-          </a:p>
-          <a:p>
-            <a:pPr marL="320040" indent="-228600">
-              <a:spcAft>
-                <a:spcPts val="600"/>
-              </a:spcAft>
-            </a:pPr>
-            <a:r>
-              <a:rPr sz="1750">
-                <a:solidFill>
-                  <a:srgbClr val="1F3D63"/>
-                </a:solidFill>
-                <a:latin typeface="IBM Plex Sans"/>
-              </a:rPr>
-              <a:t>•  </a:t>
-            </a:r>
-            <a:r>
-              <a:rPr sz="1750" b="0" i="0">
+              <a:t>Diagrams &amp; images</a:t>
+            </a:r>
+          </a:p>
+        </p:txBody>
+      </p:sp>
+      <p:sp>
+        <p:nvSpPr>
+          <p:cNvPr id="16" name="Rounded Rectangle 15"/>
+          <p:cNvSpPr/>
+          <p:nvPr/>
+        </p:nvSpPr>
+        <p:spPr>
+          <a:xfrm>
+            <a:off x="4295546" y="3663007"/>
+            <a:ext cx="3600602" cy="804799"/>
+          </a:xfrm>
+          <a:prstGeom prst="roundRect">
+            <a:avLst>
+              <a:gd name="adj" fmla="val 10000"/>
+            </a:avLst>
+          </a:prstGeom>
+          <a:solidFill>
+            <a:srgbClr val="EAEDF1"/>
+          </a:solidFill>
+          <a:ln w="9525">
+            <a:solidFill>
+              <a:srgbClr val="6D819A"/>
+            </a:solidFill>
+          </a:ln>
+          <a:effectLst/>
+        </p:spPr>
+        <p:style>
+          <a:lnRef idx="1">
+            <a:schemeClr val="accent1"/>
+          </a:lnRef>
+          <a:fillRef idx="3">
+            <a:schemeClr val="accent1"/>
+          </a:fillRef>
+          <a:effectRef idx="2">
+            <a:schemeClr val="accent1"/>
+          </a:effectRef>
+          <a:fontRef idx="minor">
+            <a:schemeClr val="lt1"/>
+          </a:fontRef>
+        </p:style>
+        <p:txBody>
+          <a:bodyPr rtlCol="0" anchor="ctr"/>
+          <a:lstStyle/>
+          <a:p>
+            <a:pPr algn="ctr"/>
+          </a:p>
+        </p:txBody>
+      </p:sp>
+      <p:sp>
+        <p:nvSpPr>
+          <p:cNvPr id="17" name="Rectangle 16"/>
+          <p:cNvSpPr/>
+          <p:nvPr/>
+        </p:nvSpPr>
+        <p:spPr>
+          <a:xfrm>
+            <a:off x="4441850" y="3809311"/>
+            <a:ext cx="164592" cy="164592"/>
+          </a:xfrm>
+          <a:prstGeom prst="rect">
+            <a:avLst/>
+          </a:prstGeom>
+          <a:solidFill>
+            <a:srgbClr val="1F3D63"/>
+          </a:solidFill>
+          <a:ln>
+            <a:noFill/>
+          </a:ln>
+          <a:effectLst/>
+        </p:spPr>
+        <p:style>
+          <a:lnRef idx="1">
+            <a:schemeClr val="accent1"/>
+          </a:lnRef>
+          <a:fillRef idx="3">
+            <a:schemeClr val="accent1"/>
+          </a:fillRef>
+          <a:effectRef idx="2">
+            <a:schemeClr val="accent1"/>
+          </a:effectRef>
+          <a:fontRef idx="minor">
+            <a:schemeClr val="lt1"/>
+          </a:fontRef>
+        </p:style>
+        <p:txBody>
+          <a:bodyPr rtlCol="0" anchor="ctr"/>
+          <a:lstStyle/>
+          <a:p>
+            <a:pPr algn="ctr"/>
+          </a:p>
+        </p:txBody>
+      </p:sp>
+      <p:sp>
+        <p:nvSpPr>
+          <p:cNvPr id="18" name="TextBox 17"/>
+          <p:cNvSpPr txBox="1"/>
+          <p:nvPr/>
+        </p:nvSpPr>
+        <p:spPr>
+          <a:xfrm>
+            <a:off x="4441850" y="4101919"/>
+            <a:ext cx="3307994" cy="219583"/>
+          </a:xfrm>
+          <a:prstGeom prst="rect">
+            <a:avLst/>
+          </a:prstGeom>
+          <a:noFill/>
+        </p:spPr>
+        <p:txBody>
+          <a:bodyPr wrap="square" lIns="0" rIns="0" tIns="0" bIns="0">
+            <a:normAutofit/>
+          </a:bodyPr>
+          <a:lstStyle/>
+          <a:p>
+            <a:r>
+              <a:rPr sz="1330" b="1" i="0">
                 <a:solidFill>
                   <a:srgbClr val="14161A"/>
                 </a:solidFill>
                 <a:latin typeface="IBM Plex Sans"/>
               </a:rPr>
-              <a:t>Secrets encrypted at rest with Fernet</a:t>
+              <a:t>Code &amp; quotes</a:t>
             </a:r>
           </a:p>
         </p:txBody>
